--- a/pptx_sessions_8_22/第22回_基礎編_講師用.pptx
+++ b/pptx_sessions_8_22/第22回_基礎編_講師用.pptx
@@ -1531,7 +1531,9 @@
           </a:ln>
         </p:spPr>
         <p:txBody>
-          <a:bodyPr/>
+          <a:bodyPr wrap="square">
+            <a:normAutofit/>
+          </a:bodyPr>
           <a:p/>
         </p:txBody>
       </p:sp>
@@ -1560,7 +1562,9 @@
           </a:ln>
         </p:spPr>
         <p:txBody>
-          <a:bodyPr/>
+          <a:bodyPr wrap="square">
+            <a:normAutofit/>
+          </a:bodyPr>
           <a:p/>
         </p:txBody>
       </p:sp>
@@ -1582,7 +1586,9 @@
           <a:ln/>
         </p:spPr>
         <p:txBody>
-          <a:bodyPr wrap="square" rtlCol="0" anchor="ctr"/>
+          <a:bodyPr wrap="square" rtlCol="0" anchor="ctr">
+            <a:normAutofit/>
+          </a:bodyPr>
           <a:lstStyle/>
           <a:p>
             <a:pPr algn="ctr" indent="0" marL="0">
@@ -1621,7 +1627,9 @@
           <a:ln/>
         </p:spPr>
         <p:txBody>
-          <a:bodyPr wrap="square" rtlCol="0" anchor="ctr"/>
+          <a:bodyPr wrap="square" rtlCol="0" anchor="ctr">
+            <a:normAutofit/>
+          </a:bodyPr>
           <a:lstStyle/>
           <a:p>
             <a:pPr algn="ctr" indent="0" marL="0">
@@ -1660,7 +1668,9 @@
           <a:ln/>
         </p:spPr>
         <p:txBody>
-          <a:bodyPr wrap="square" rtlCol="0" anchor="ctr"/>
+          <a:bodyPr wrap="square" rtlCol="0" anchor="ctr">
+            <a:normAutofit/>
+          </a:bodyPr>
           <a:lstStyle/>
           <a:p>
             <a:pPr algn="ctr" indent="0" marL="0">
@@ -1699,7 +1709,9 @@
           <a:ln/>
         </p:spPr>
         <p:txBody>
-          <a:bodyPr wrap="square" rtlCol="0" anchor="ctr"/>
+          <a:bodyPr wrap="square" rtlCol="0" anchor="ctr">
+            <a:normAutofit/>
+          </a:bodyPr>
           <a:lstStyle/>
           <a:p>
             <a:pPr algn="ctr" indent="0" marL="0">
@@ -1747,7 +1759,9 @@
           </a:ln>
         </p:spPr>
         <p:txBody>
-          <a:bodyPr/>
+          <a:bodyPr wrap="square">
+            <a:normAutofit/>
+          </a:bodyPr>
           <a:p/>
         </p:txBody>
       </p:sp>
@@ -1769,7 +1783,9 @@
           <a:ln/>
         </p:spPr>
         <p:txBody>
-          <a:bodyPr wrap="square" rtlCol="0" anchor="ctr"/>
+          <a:bodyPr wrap="square" rtlCol="0" anchor="ctr">
+            <a:normAutofit/>
+          </a:bodyPr>
           <a:lstStyle/>
           <a:p>
             <a:pPr algn="ctr" indent="0" marL="0">
@@ -1840,7 +1856,9 @@
           </a:ln>
         </p:spPr>
         <p:txBody>
-          <a:bodyPr/>
+          <a:bodyPr wrap="square">
+            <a:normAutofit/>
+          </a:bodyPr>
           <a:p/>
         </p:txBody>
       </p:sp>
@@ -1869,7 +1887,9 @@
           </a:ln>
         </p:spPr>
         <p:txBody>
-          <a:bodyPr/>
+          <a:bodyPr wrap="square">
+            <a:normAutofit/>
+          </a:bodyPr>
           <a:p/>
         </p:txBody>
       </p:sp>
@@ -1891,7 +1911,9 @@
           <a:ln/>
         </p:spPr>
         <p:txBody>
-          <a:bodyPr wrap="square" rtlCol="0" anchor="ctr"/>
+          <a:bodyPr wrap="square" rtlCol="0" anchor="ctr">
+            <a:normAutofit/>
+          </a:bodyPr>
           <a:lstStyle/>
           <a:p>
             <a:pPr indent="0" marL="0">
@@ -1930,7 +1952,9 @@
           <a:ln/>
         </p:spPr>
         <p:txBody>
-          <a:bodyPr wrap="square" rtlCol="0" anchor="ctr"/>
+          <a:bodyPr wrap="square" rtlCol="0" anchor="ctr">
+            <a:normAutofit/>
+          </a:bodyPr>
           <a:lstStyle/>
           <a:p>
             <a:pPr indent="0" marL="0">
@@ -1978,7 +2002,9 @@
           </a:ln>
         </p:spPr>
         <p:txBody>
-          <a:bodyPr/>
+          <a:bodyPr wrap="square">
+            <a:normAutofit/>
+          </a:bodyPr>
           <a:p/>
         </p:txBody>
       </p:sp>
@@ -2000,7 +2026,9 @@
           <a:ln/>
         </p:spPr>
         <p:txBody>
-          <a:bodyPr wrap="square" rtlCol="0" anchor="ctr"/>
+          <a:bodyPr wrap="square" rtlCol="0" anchor="ctr">
+            <a:normAutofit/>
+          </a:bodyPr>
           <a:lstStyle/>
           <a:p>
             <a:pPr indent="0" marL="0">
@@ -2039,7 +2067,9 @@
           <a:ln/>
         </p:spPr>
         <p:txBody>
-          <a:bodyPr wrap="square" rtlCol="0" anchor="ctr"/>
+          <a:bodyPr wrap="square" rtlCol="0" anchor="ctr">
+            <a:normAutofit/>
+          </a:bodyPr>
           <a:lstStyle/>
           <a:p>
             <a:pPr indent="0" marL="0">
@@ -2078,7 +2108,9 @@
           <a:ln/>
         </p:spPr>
         <p:txBody>
-          <a:bodyPr wrap="square" rtlCol="0" anchor="ctr"/>
+          <a:bodyPr wrap="square" rtlCol="0" anchor="ctr">
+            <a:normAutofit/>
+          </a:bodyPr>
           <a:lstStyle/>
           <a:p>
             <a:pPr indent="0" marL="0">
@@ -2126,7 +2158,9 @@
           </a:ln>
         </p:spPr>
         <p:txBody>
-          <a:bodyPr/>
+          <a:bodyPr wrap="square">
+            <a:normAutofit/>
+          </a:bodyPr>
           <a:p/>
         </p:txBody>
       </p:sp>
@@ -2148,7 +2182,9 @@
           <a:ln/>
         </p:spPr>
         <p:txBody>
-          <a:bodyPr wrap="square" rtlCol="0" anchor="ctr"/>
+          <a:bodyPr wrap="square" rtlCol="0" anchor="ctr">
+            <a:normAutofit/>
+          </a:bodyPr>
           <a:lstStyle/>
           <a:p>
             <a:pPr indent="0" marL="0">
@@ -2187,7 +2223,9 @@
           <a:ln/>
         </p:spPr>
         <p:txBody>
-          <a:bodyPr wrap="square" rtlCol="0" anchor="ctr"/>
+          <a:bodyPr wrap="square" rtlCol="0" anchor="ctr">
+            <a:normAutofit/>
+          </a:bodyPr>
           <a:lstStyle/>
           <a:p>
             <a:pPr indent="0" marL="0">
@@ -2226,7 +2264,9 @@
           <a:ln/>
         </p:spPr>
         <p:txBody>
-          <a:bodyPr wrap="square" rtlCol="0" anchor="ctr"/>
+          <a:bodyPr wrap="square" rtlCol="0" anchor="ctr">
+            <a:normAutofit/>
+          </a:bodyPr>
           <a:lstStyle/>
           <a:p>
             <a:pPr indent="0" marL="0">
@@ -2274,7 +2314,9 @@
           </a:ln>
         </p:spPr>
         <p:txBody>
-          <a:bodyPr/>
+          <a:bodyPr wrap="square">
+            <a:normAutofit/>
+          </a:bodyPr>
           <a:p/>
         </p:txBody>
       </p:sp>
@@ -2296,7 +2338,9 @@
           <a:ln/>
         </p:spPr>
         <p:txBody>
-          <a:bodyPr wrap="square" rtlCol="0" anchor="ctr"/>
+          <a:bodyPr wrap="square" rtlCol="0" anchor="ctr">
+            <a:normAutofit/>
+          </a:bodyPr>
           <a:lstStyle/>
           <a:p>
             <a:pPr indent="0" marL="0">
@@ -2335,7 +2379,9 @@
           <a:ln/>
         </p:spPr>
         <p:txBody>
-          <a:bodyPr wrap="square" rtlCol="0" anchor="ctr"/>
+          <a:bodyPr wrap="square" rtlCol="0" anchor="ctr">
+            <a:normAutofit/>
+          </a:bodyPr>
           <a:lstStyle/>
           <a:p>
             <a:pPr indent="0" marL="0">
@@ -2374,7 +2420,9 @@
           <a:ln/>
         </p:spPr>
         <p:txBody>
-          <a:bodyPr wrap="square" rtlCol="0" anchor="ctr"/>
+          <a:bodyPr wrap="square" rtlCol="0" anchor="ctr">
+            <a:normAutofit/>
+          </a:bodyPr>
           <a:lstStyle/>
           <a:p>
             <a:pPr indent="0" marL="0">
@@ -2413,7 +2461,9 @@
           <a:ln/>
         </p:spPr>
         <p:txBody>
-          <a:bodyPr wrap="square" rtlCol="0" anchor="ctr"/>
+          <a:bodyPr wrap="square" rtlCol="0" anchor="ctr">
+            <a:normAutofit/>
+          </a:bodyPr>
           <a:lstStyle/>
           <a:p>
             <a:pPr algn="r" indent="0" marL="0">
@@ -2484,7 +2534,9 @@
           </a:ln>
         </p:spPr>
         <p:txBody>
-          <a:bodyPr/>
+          <a:bodyPr wrap="square">
+            <a:normAutofit/>
+          </a:bodyPr>
           <a:p/>
         </p:txBody>
       </p:sp>
@@ -2513,7 +2565,9 @@
           </a:ln>
         </p:spPr>
         <p:txBody>
-          <a:bodyPr/>
+          <a:bodyPr wrap="square">
+            <a:normAutofit/>
+          </a:bodyPr>
           <a:p/>
         </p:txBody>
       </p:sp>
@@ -2535,7 +2589,9 @@
           <a:ln/>
         </p:spPr>
         <p:txBody>
-          <a:bodyPr wrap="square" rtlCol="0" anchor="ctr"/>
+          <a:bodyPr wrap="square" rtlCol="0" anchor="ctr">
+            <a:normAutofit/>
+          </a:bodyPr>
           <a:lstStyle/>
           <a:p>
             <a:pPr indent="0" marL="0">
@@ -2574,7 +2630,9 @@
           <a:ln/>
         </p:spPr>
         <p:txBody>
-          <a:bodyPr wrap="square" rtlCol="0" anchor="ctr"/>
+          <a:bodyPr wrap="square" rtlCol="0" anchor="ctr">
+            <a:normAutofit/>
+          </a:bodyPr>
           <a:lstStyle/>
           <a:p>
             <a:pPr indent="0" marL="0">
@@ -2620,7 +2678,9 @@
           </a:ln>
         </p:spPr>
         <p:txBody>
-          <a:bodyPr/>
+          <a:bodyPr wrap="square">
+            <a:normAutofit/>
+          </a:bodyPr>
           <a:p/>
         </p:txBody>
       </p:sp>
@@ -2651,7 +2711,9 @@
           </a:ln>
         </p:spPr>
         <p:txBody>
-          <a:bodyPr/>
+          <a:bodyPr wrap="square">
+            <a:normAutofit/>
+          </a:bodyPr>
           <a:p/>
         </p:txBody>
       </p:sp>
@@ -2673,7 +2735,9 @@
           <a:ln/>
         </p:spPr>
         <p:txBody>
-          <a:bodyPr wrap="square" rtlCol="0" anchor="ctr"/>
+          <a:bodyPr wrap="square" rtlCol="0" anchor="ctr">
+            <a:normAutofit/>
+          </a:bodyPr>
           <a:lstStyle/>
           <a:p>
             <a:pPr algn="ctr" indent="0" marL="0">
@@ -2712,7 +2776,9 @@
           <a:ln/>
         </p:spPr>
         <p:txBody>
-          <a:bodyPr wrap="square" rtlCol="0" anchor="ctr"/>
+          <a:bodyPr wrap="square" rtlCol="0" anchor="ctr">
+            <a:normAutofit/>
+          </a:bodyPr>
           <a:lstStyle/>
           <a:p>
             <a:pPr indent="0" marL="0">
@@ -2758,7 +2824,9 @@
           </a:ln>
         </p:spPr>
         <p:txBody>
-          <a:bodyPr/>
+          <a:bodyPr wrap="square">
+            <a:normAutofit/>
+          </a:bodyPr>
           <a:p/>
         </p:txBody>
       </p:sp>
@@ -2789,7 +2857,9 @@
           </a:ln>
         </p:spPr>
         <p:txBody>
-          <a:bodyPr/>
+          <a:bodyPr wrap="square">
+            <a:normAutofit/>
+          </a:bodyPr>
           <a:p/>
         </p:txBody>
       </p:sp>
@@ -2811,7 +2881,9 @@
           <a:ln/>
         </p:spPr>
         <p:txBody>
-          <a:bodyPr wrap="square" rtlCol="0" anchor="ctr"/>
+          <a:bodyPr wrap="square" rtlCol="0" anchor="ctr">
+            <a:normAutofit/>
+          </a:bodyPr>
           <a:lstStyle/>
           <a:p>
             <a:pPr algn="ctr" indent="0" marL="0">
@@ -2850,7 +2922,9 @@
           <a:ln/>
         </p:spPr>
         <p:txBody>
-          <a:bodyPr wrap="square" rtlCol="0" anchor="ctr"/>
+          <a:bodyPr wrap="square" rtlCol="0" anchor="ctr">
+            <a:normAutofit/>
+          </a:bodyPr>
           <a:lstStyle/>
           <a:p>
             <a:pPr indent="0" marL="0">
@@ -2889,7 +2963,9 @@
           <a:ln/>
         </p:spPr>
         <p:txBody>
-          <a:bodyPr wrap="square" rtlCol="0" anchor="ctr"/>
+          <a:bodyPr wrap="square" rtlCol="0" anchor="ctr">
+            <a:normAutofit/>
+          </a:bodyPr>
           <a:lstStyle/>
           <a:p>
             <a:pPr indent="0" marL="0">
@@ -2937,7 +3013,9 @@
           </a:ln>
         </p:spPr>
         <p:txBody>
-          <a:bodyPr/>
+          <a:bodyPr wrap="square">
+            <a:normAutofit/>
+          </a:bodyPr>
           <a:p/>
         </p:txBody>
       </p:sp>
@@ -2968,7 +3046,9 @@
           </a:ln>
         </p:spPr>
         <p:txBody>
-          <a:bodyPr/>
+          <a:bodyPr wrap="square">
+            <a:normAutofit/>
+          </a:bodyPr>
           <a:p/>
         </p:txBody>
       </p:sp>
@@ -2990,7 +3070,9 @@
           <a:ln/>
         </p:spPr>
         <p:txBody>
-          <a:bodyPr wrap="square" rtlCol="0" anchor="ctr"/>
+          <a:bodyPr wrap="square" rtlCol="0" anchor="ctr">
+            <a:normAutofit/>
+          </a:bodyPr>
           <a:lstStyle/>
           <a:p>
             <a:pPr algn="ctr" indent="0" marL="0">
@@ -3029,7 +3111,9 @@
           <a:ln/>
         </p:spPr>
         <p:txBody>
-          <a:bodyPr wrap="square" rtlCol="0" anchor="ctr"/>
+          <a:bodyPr wrap="square" rtlCol="0" anchor="ctr">
+            <a:normAutofit/>
+          </a:bodyPr>
           <a:lstStyle/>
           <a:p>
             <a:pPr indent="0" marL="0">
@@ -3077,7 +3161,9 @@
           </a:ln>
         </p:spPr>
         <p:txBody>
-          <a:bodyPr/>
+          <a:bodyPr wrap="square">
+            <a:normAutofit/>
+          </a:bodyPr>
           <a:p/>
         </p:txBody>
       </p:sp>
@@ -3108,7 +3194,9 @@
           </a:ln>
         </p:spPr>
         <p:txBody>
-          <a:bodyPr/>
+          <a:bodyPr wrap="square">
+            <a:normAutofit/>
+          </a:bodyPr>
           <a:p/>
         </p:txBody>
       </p:sp>
@@ -3130,7 +3218,9 @@
           <a:ln/>
         </p:spPr>
         <p:txBody>
-          <a:bodyPr wrap="square" rtlCol="0" anchor="ctr"/>
+          <a:bodyPr wrap="square" rtlCol="0" anchor="ctr">
+            <a:normAutofit/>
+          </a:bodyPr>
           <a:lstStyle/>
           <a:p>
             <a:pPr algn="ctr" indent="0" marL="0">
@@ -3169,7 +3259,9 @@
           <a:ln/>
         </p:spPr>
         <p:txBody>
-          <a:bodyPr wrap="square" rtlCol="0" anchor="ctr"/>
+          <a:bodyPr wrap="square" rtlCol="0" anchor="ctr">
+            <a:normAutofit/>
+          </a:bodyPr>
           <a:lstStyle/>
           <a:p>
             <a:pPr indent="0" marL="0">
@@ -3217,7 +3309,9 @@
           </a:ln>
         </p:spPr>
         <p:txBody>
-          <a:bodyPr/>
+          <a:bodyPr wrap="square">
+            <a:normAutofit/>
+          </a:bodyPr>
           <a:p/>
         </p:txBody>
       </p:sp>
@@ -3248,7 +3342,9 @@
           </a:ln>
         </p:spPr>
         <p:txBody>
-          <a:bodyPr/>
+          <a:bodyPr wrap="square">
+            <a:normAutofit/>
+          </a:bodyPr>
           <a:p/>
         </p:txBody>
       </p:sp>
@@ -3270,7 +3366,9 @@
           <a:ln/>
         </p:spPr>
         <p:txBody>
-          <a:bodyPr wrap="square" rtlCol="0" anchor="ctr"/>
+          <a:bodyPr wrap="square" rtlCol="0" anchor="ctr">
+            <a:normAutofit/>
+          </a:bodyPr>
           <a:lstStyle/>
           <a:p>
             <a:pPr algn="ctr" indent="0" marL="0">
@@ -3309,7 +3407,9 @@
           <a:ln/>
         </p:spPr>
         <p:txBody>
-          <a:bodyPr wrap="square" rtlCol="0" anchor="ctr"/>
+          <a:bodyPr wrap="square" rtlCol="0" anchor="ctr">
+            <a:normAutofit/>
+          </a:bodyPr>
           <a:lstStyle/>
           <a:p>
             <a:pPr indent="0" marL="0">
@@ -3357,7 +3457,9 @@
           </a:ln>
         </p:spPr>
         <p:txBody>
-          <a:bodyPr/>
+          <a:bodyPr wrap="square">
+            <a:normAutofit/>
+          </a:bodyPr>
           <a:p/>
         </p:txBody>
       </p:sp>
@@ -3388,7 +3490,9 @@
           </a:ln>
         </p:spPr>
         <p:txBody>
-          <a:bodyPr/>
+          <a:bodyPr wrap="square">
+            <a:normAutofit/>
+          </a:bodyPr>
           <a:p/>
         </p:txBody>
       </p:sp>
@@ -3410,7 +3514,9 @@
           <a:ln/>
         </p:spPr>
         <p:txBody>
-          <a:bodyPr wrap="square" rtlCol="0" anchor="ctr"/>
+          <a:bodyPr wrap="square" rtlCol="0" anchor="ctr">
+            <a:normAutofit/>
+          </a:bodyPr>
           <a:lstStyle/>
           <a:p>
             <a:pPr algn="ctr" indent="0" marL="0">
@@ -3449,7 +3555,9 @@
           <a:ln/>
         </p:spPr>
         <p:txBody>
-          <a:bodyPr wrap="square" rtlCol="0" anchor="ctr"/>
+          <a:bodyPr wrap="square" rtlCol="0" anchor="ctr">
+            <a:normAutofit/>
+          </a:bodyPr>
           <a:lstStyle/>
           <a:p>
             <a:pPr indent="0" marL="0">
@@ -3497,7 +3605,9 @@
           </a:ln>
         </p:spPr>
         <p:txBody>
-          <a:bodyPr/>
+          <a:bodyPr wrap="square">
+            <a:normAutofit/>
+          </a:bodyPr>
           <a:p/>
         </p:txBody>
       </p:sp>
@@ -3528,7 +3638,9 @@
           </a:ln>
         </p:spPr>
         <p:txBody>
-          <a:bodyPr/>
+          <a:bodyPr wrap="square">
+            <a:normAutofit/>
+          </a:bodyPr>
           <a:p/>
         </p:txBody>
       </p:sp>
@@ -3550,7 +3662,9 @@
           <a:ln/>
         </p:spPr>
         <p:txBody>
-          <a:bodyPr wrap="square" rtlCol="0" anchor="ctr"/>
+          <a:bodyPr wrap="square" rtlCol="0" anchor="ctr">
+            <a:normAutofit/>
+          </a:bodyPr>
           <a:lstStyle/>
           <a:p>
             <a:pPr algn="ctr" indent="0" marL="0">
@@ -3589,7 +3703,9 @@
           <a:ln/>
         </p:spPr>
         <p:txBody>
-          <a:bodyPr wrap="square" rtlCol="0" anchor="ctr"/>
+          <a:bodyPr wrap="square" rtlCol="0" anchor="ctr">
+            <a:normAutofit/>
+          </a:bodyPr>
           <a:lstStyle/>
           <a:p>
             <a:pPr indent="0" marL="0">
@@ -3628,7 +3744,9 @@
           <a:ln/>
         </p:spPr>
         <p:txBody>
-          <a:bodyPr wrap="square" rtlCol="0" anchor="ctr"/>
+          <a:bodyPr wrap="square" rtlCol="0" anchor="ctr">
+            <a:normAutofit/>
+          </a:bodyPr>
           <a:lstStyle/>
           <a:p>
             <a:pPr algn="r" indent="0" marL="0">
@@ -3699,7 +3817,9 @@
           </a:ln>
         </p:spPr>
         <p:txBody>
-          <a:bodyPr/>
+          <a:bodyPr wrap="square">
+            <a:normAutofit/>
+          </a:bodyPr>
           <a:p/>
         </p:txBody>
       </p:sp>
@@ -3728,7 +3848,9 @@
           </a:ln>
         </p:spPr>
         <p:txBody>
-          <a:bodyPr/>
+          <a:bodyPr wrap="square">
+            <a:normAutofit/>
+          </a:bodyPr>
           <a:p/>
         </p:txBody>
       </p:sp>
@@ -3759,7 +3881,9 @@
           </a:ln>
         </p:spPr>
         <p:txBody>
-          <a:bodyPr/>
+          <a:bodyPr wrap="square">
+            <a:normAutofit/>
+          </a:bodyPr>
           <a:p/>
         </p:txBody>
       </p:sp>
@@ -3781,7 +3905,9 @@
           <a:ln/>
         </p:spPr>
         <p:txBody>
-          <a:bodyPr wrap="square" rtlCol="0" anchor="ctr"/>
+          <a:bodyPr wrap="square" rtlCol="0" anchor="ctr">
+            <a:normAutofit/>
+          </a:bodyPr>
           <a:lstStyle/>
           <a:p>
             <a:pPr algn="ctr" indent="0" marL="0">
@@ -3820,7 +3946,9 @@
           <a:ln/>
         </p:spPr>
         <p:txBody>
-          <a:bodyPr wrap="square" rtlCol="0" anchor="ctr"/>
+          <a:bodyPr wrap="square" rtlCol="0" anchor="ctr">
+            <a:normAutofit/>
+          </a:bodyPr>
           <a:lstStyle/>
           <a:p>
             <a:pPr indent="0" marL="0">
@@ -3859,7 +3987,9 @@
           <a:ln/>
         </p:spPr>
         <p:txBody>
-          <a:bodyPr wrap="square" rtlCol="0" anchor="ctr"/>
+          <a:bodyPr wrap="square" rtlCol="0" anchor="ctr">
+            <a:normAutofit/>
+          </a:bodyPr>
           <a:lstStyle/>
           <a:p>
             <a:pPr indent="0" marL="0">
@@ -3907,7 +4037,9 @@
           </a:ln>
         </p:spPr>
         <p:txBody>
-          <a:bodyPr/>
+          <a:bodyPr wrap="square">
+            <a:normAutofit/>
+          </a:bodyPr>
           <a:p/>
         </p:txBody>
       </p:sp>
@@ -3929,7 +4061,9 @@
           <a:ln/>
         </p:spPr>
         <p:txBody>
-          <a:bodyPr wrap="square" rtlCol="0" anchor="ctr"/>
+          <a:bodyPr wrap="square" rtlCol="0" anchor="ctr">
+            <a:normAutofit/>
+          </a:bodyPr>
           <a:lstStyle/>
           <a:p>
             <a:pPr indent="0" marL="0">
@@ -3968,7 +4102,9 @@
           <a:ln/>
         </p:spPr>
         <p:txBody>
-          <a:bodyPr wrap="square" rtlCol="0" anchor="t"/>
+          <a:bodyPr wrap="square" rtlCol="0" anchor="t">
+            <a:normAutofit/>
+          </a:bodyPr>
           <a:lstStyle/>
           <a:p>
             <a:pPr indent="0" marL="0">
@@ -4245,7 +4381,9 @@
           <a:ln/>
         </p:spPr>
         <p:txBody>
-          <a:bodyPr wrap="square" rtlCol="0" anchor="ctr"/>
+          <a:bodyPr wrap="square" rtlCol="0" anchor="ctr">
+            <a:normAutofit/>
+          </a:bodyPr>
           <a:lstStyle/>
           <a:p>
             <a:pPr algn="r" indent="0" marL="0">
@@ -4316,7 +4454,9 @@
           </a:ln>
         </p:spPr>
         <p:txBody>
-          <a:bodyPr/>
+          <a:bodyPr wrap="square">
+            <a:normAutofit/>
+          </a:bodyPr>
           <a:p/>
         </p:txBody>
       </p:sp>
@@ -4345,7 +4485,9 @@
           </a:ln>
         </p:spPr>
         <p:txBody>
-          <a:bodyPr/>
+          <a:bodyPr wrap="square">
+            <a:normAutofit/>
+          </a:bodyPr>
           <a:p/>
         </p:txBody>
       </p:sp>
@@ -4376,7 +4518,9 @@
           </a:ln>
         </p:spPr>
         <p:txBody>
-          <a:bodyPr/>
+          <a:bodyPr wrap="square">
+            <a:normAutofit/>
+          </a:bodyPr>
           <a:p/>
         </p:txBody>
       </p:sp>
@@ -4398,7 +4542,9 @@
           <a:ln/>
         </p:spPr>
         <p:txBody>
-          <a:bodyPr wrap="square" rtlCol="0" anchor="ctr"/>
+          <a:bodyPr wrap="square" rtlCol="0" anchor="ctr">
+            <a:normAutofit/>
+          </a:bodyPr>
           <a:lstStyle/>
           <a:p>
             <a:pPr algn="ctr" indent="0" marL="0">
@@ -4437,7 +4583,9 @@
           <a:ln/>
         </p:spPr>
         <p:txBody>
-          <a:bodyPr wrap="square" rtlCol="0" anchor="ctr"/>
+          <a:bodyPr wrap="square" rtlCol="0" anchor="ctr">
+            <a:normAutofit/>
+          </a:bodyPr>
           <a:lstStyle/>
           <a:p>
             <a:pPr indent="0" marL="0">
@@ -4476,7 +4624,9 @@
           <a:ln/>
         </p:spPr>
         <p:txBody>
-          <a:bodyPr wrap="square" rtlCol="0" anchor="ctr"/>
+          <a:bodyPr wrap="square" rtlCol="0" anchor="ctr">
+            <a:normAutofit/>
+          </a:bodyPr>
           <a:lstStyle/>
           <a:p>
             <a:pPr indent="0" marL="0">
@@ -4524,7 +4674,9 @@
           </a:ln>
         </p:spPr>
         <p:txBody>
-          <a:bodyPr/>
+          <a:bodyPr wrap="square">
+            <a:normAutofit/>
+          </a:bodyPr>
           <a:p/>
         </p:txBody>
       </p:sp>
@@ -4546,7 +4698,9 @@
           <a:ln/>
         </p:spPr>
         <p:txBody>
-          <a:bodyPr wrap="square" rtlCol="0" anchor="ctr"/>
+          <a:bodyPr wrap="square" rtlCol="0" anchor="ctr">
+            <a:normAutofit/>
+          </a:bodyPr>
           <a:lstStyle/>
           <a:p>
             <a:pPr indent="0" marL="0">
@@ -4585,7 +4739,9 @@
           <a:ln/>
         </p:spPr>
         <p:txBody>
-          <a:bodyPr wrap="square" rtlCol="0" anchor="ctr"/>
+          <a:bodyPr wrap="square" rtlCol="0" anchor="ctr">
+            <a:normAutofit/>
+          </a:bodyPr>
           <a:lstStyle/>
           <a:p>
             <a:pPr indent="0" marL="0">
@@ -4624,7 +4780,9 @@
           <a:ln/>
         </p:spPr>
         <p:txBody>
-          <a:bodyPr wrap="square" rtlCol="0" anchor="t"/>
+          <a:bodyPr wrap="square" rtlCol="0" anchor="t">
+            <a:normAutofit/>
+          </a:bodyPr>
           <a:lstStyle/>
           <a:p>
             <a:pPr indent="0" marL="0">
@@ -4663,7 +4821,9 @@
           <a:ln/>
         </p:spPr>
         <p:txBody>
-          <a:bodyPr wrap="square" rtlCol="0" anchor="ctr"/>
+          <a:bodyPr wrap="square" rtlCol="0" anchor="ctr">
+            <a:normAutofit/>
+          </a:bodyPr>
           <a:lstStyle/>
           <a:p>
             <a:pPr indent="0" marL="0">
@@ -4702,7 +4862,9 @@
           <a:ln/>
         </p:spPr>
         <p:txBody>
-          <a:bodyPr wrap="square" rtlCol="0" anchor="t"/>
+          <a:bodyPr wrap="square" rtlCol="0" anchor="t">
+            <a:normAutofit/>
+          </a:bodyPr>
           <a:lstStyle/>
           <a:p>
             <a:pPr indent="0" marL="0">
@@ -4741,7 +4903,9 @@
           <a:ln/>
         </p:spPr>
         <p:txBody>
-          <a:bodyPr wrap="square" rtlCol="0" anchor="ctr"/>
+          <a:bodyPr wrap="square" rtlCol="0" anchor="ctr">
+            <a:normAutofit/>
+          </a:bodyPr>
           <a:lstStyle/>
           <a:p>
             <a:pPr indent="0" marL="0">
@@ -4780,7 +4944,9 @@
           <a:ln/>
         </p:spPr>
         <p:txBody>
-          <a:bodyPr wrap="square" rtlCol="0" anchor="t"/>
+          <a:bodyPr wrap="square" rtlCol="0" anchor="t">
+            <a:normAutofit/>
+          </a:bodyPr>
           <a:lstStyle/>
           <a:p>
             <a:pPr indent="0" marL="0">
@@ -4828,7 +4994,9 @@
           </a:ln>
         </p:spPr>
         <p:txBody>
-          <a:bodyPr/>
+          <a:bodyPr wrap="square">
+            <a:normAutofit/>
+          </a:bodyPr>
           <a:p/>
         </p:txBody>
       </p:sp>
@@ -4850,7 +5018,9 @@
           <a:ln/>
         </p:spPr>
         <p:txBody>
-          <a:bodyPr wrap="square" rtlCol="0" anchor="ctr"/>
+          <a:bodyPr wrap="square" rtlCol="0" anchor="ctr">
+            <a:normAutofit/>
+          </a:bodyPr>
           <a:lstStyle/>
           <a:p>
             <a:pPr indent="0" marL="0">
@@ -4889,7 +5059,9 @@
           <a:ln/>
         </p:spPr>
         <p:txBody>
-          <a:bodyPr wrap="square" rtlCol="0" anchor="t"/>
+          <a:bodyPr wrap="square" rtlCol="0" anchor="t">
+            <a:normAutofit/>
+          </a:bodyPr>
           <a:lstStyle/>
           <a:p>
             <a:pPr indent="0" marL="0">
@@ -4928,7 +5100,9 @@
           <a:ln/>
         </p:spPr>
         <p:txBody>
-          <a:bodyPr wrap="square" rtlCol="0" anchor="t"/>
+          <a:bodyPr wrap="square" rtlCol="0" anchor="t">
+            <a:normAutofit/>
+          </a:bodyPr>
           <a:lstStyle/>
           <a:p>
             <a:pPr indent="0" marL="0">
@@ -4967,7 +5141,9 @@
           <a:ln/>
         </p:spPr>
         <p:txBody>
-          <a:bodyPr wrap="square" rtlCol="0" anchor="t"/>
+          <a:bodyPr wrap="square" rtlCol="0" anchor="t">
+            <a:normAutofit/>
+          </a:bodyPr>
           <a:lstStyle/>
           <a:p>
             <a:pPr indent="0" marL="0">
@@ -5006,7 +5182,9 @@
           <a:ln/>
         </p:spPr>
         <p:txBody>
-          <a:bodyPr wrap="square" rtlCol="0" anchor="ctr"/>
+          <a:bodyPr wrap="square" rtlCol="0" anchor="ctr">
+            <a:normAutofit/>
+          </a:bodyPr>
           <a:lstStyle/>
           <a:p>
             <a:pPr algn="r" indent="0" marL="0">
@@ -5077,7 +5255,9 @@
           </a:ln>
         </p:spPr>
         <p:txBody>
-          <a:bodyPr/>
+          <a:bodyPr wrap="square">
+            <a:normAutofit/>
+          </a:bodyPr>
           <a:p/>
         </p:txBody>
       </p:sp>
@@ -5106,7 +5286,9 @@
           </a:ln>
         </p:spPr>
         <p:txBody>
-          <a:bodyPr/>
+          <a:bodyPr wrap="square">
+            <a:normAutofit/>
+          </a:bodyPr>
           <a:p/>
         </p:txBody>
       </p:sp>
@@ -5137,7 +5319,9 @@
           </a:ln>
         </p:spPr>
         <p:txBody>
-          <a:bodyPr/>
+          <a:bodyPr wrap="square">
+            <a:normAutofit/>
+          </a:bodyPr>
           <a:p/>
         </p:txBody>
       </p:sp>
@@ -5159,7 +5343,9 @@
           <a:ln/>
         </p:spPr>
         <p:txBody>
-          <a:bodyPr wrap="square" rtlCol="0" anchor="ctr"/>
+          <a:bodyPr wrap="square" rtlCol="0" anchor="ctr">
+            <a:normAutofit/>
+          </a:bodyPr>
           <a:lstStyle/>
           <a:p>
             <a:pPr algn="ctr" indent="0" marL="0">
@@ -5198,7 +5384,9 @@
           <a:ln/>
         </p:spPr>
         <p:txBody>
-          <a:bodyPr wrap="square" rtlCol="0" anchor="ctr"/>
+          <a:bodyPr wrap="square" rtlCol="0" anchor="ctr">
+            <a:normAutofit/>
+          </a:bodyPr>
           <a:lstStyle/>
           <a:p>
             <a:pPr indent="0" marL="0">
@@ -5237,7 +5425,9 @@
           <a:ln/>
         </p:spPr>
         <p:txBody>
-          <a:bodyPr wrap="square" rtlCol="0" anchor="ctr"/>
+          <a:bodyPr wrap="square" rtlCol="0" anchor="ctr">
+            <a:normAutofit/>
+          </a:bodyPr>
           <a:lstStyle/>
           <a:p>
             <a:pPr indent="0" marL="0">
@@ -5285,7 +5475,9 @@
           </a:ln>
         </p:spPr>
         <p:txBody>
-          <a:bodyPr/>
+          <a:bodyPr wrap="square">
+            <a:normAutofit/>
+          </a:bodyPr>
           <a:p/>
         </p:txBody>
       </p:sp>
@@ -5307,7 +5499,9 @@
           <a:ln/>
         </p:spPr>
         <p:txBody>
-          <a:bodyPr wrap="square" rtlCol="0" anchor="ctr"/>
+          <a:bodyPr wrap="square" rtlCol="0" anchor="ctr">
+            <a:normAutofit/>
+          </a:bodyPr>
           <a:lstStyle/>
           <a:p>
             <a:pPr indent="0" marL="0">
@@ -5346,7 +5540,9 @@
           <a:ln/>
         </p:spPr>
         <p:txBody>
-          <a:bodyPr wrap="square" rtlCol="0" anchor="t"/>
+          <a:bodyPr wrap="square" rtlCol="0" anchor="t">
+            <a:normAutofit/>
+          </a:bodyPr>
           <a:lstStyle/>
           <a:p>
             <a:pPr indent="0" marL="0">
@@ -5691,7 +5887,9 @@
           <a:ln/>
         </p:spPr>
         <p:txBody>
-          <a:bodyPr wrap="square" rtlCol="0" anchor="ctr"/>
+          <a:bodyPr wrap="square" rtlCol="0" anchor="ctr">
+            <a:normAutofit/>
+          </a:bodyPr>
           <a:lstStyle/>
           <a:p>
             <a:pPr algn="r" indent="0" marL="0">
@@ -5762,7 +5960,9 @@
           </a:ln>
         </p:spPr>
         <p:txBody>
-          <a:bodyPr/>
+          <a:bodyPr wrap="square">
+            <a:normAutofit/>
+          </a:bodyPr>
           <a:p/>
         </p:txBody>
       </p:sp>
@@ -5791,7 +5991,9 @@
           </a:ln>
         </p:spPr>
         <p:txBody>
-          <a:bodyPr/>
+          <a:bodyPr wrap="square">
+            <a:normAutofit/>
+          </a:bodyPr>
           <a:p/>
         </p:txBody>
       </p:sp>
@@ -5822,7 +6024,9 @@
           </a:ln>
         </p:spPr>
         <p:txBody>
-          <a:bodyPr/>
+          <a:bodyPr wrap="square">
+            <a:normAutofit/>
+          </a:bodyPr>
           <a:p/>
         </p:txBody>
       </p:sp>
@@ -5844,7 +6048,9 @@
           <a:ln/>
         </p:spPr>
         <p:txBody>
-          <a:bodyPr wrap="square" rtlCol="0" anchor="ctr"/>
+          <a:bodyPr wrap="square" rtlCol="0" anchor="ctr">
+            <a:normAutofit/>
+          </a:bodyPr>
           <a:lstStyle/>
           <a:p>
             <a:pPr algn="ctr" indent="0" marL="0">
@@ -5883,7 +6089,9 @@
           <a:ln/>
         </p:spPr>
         <p:txBody>
-          <a:bodyPr wrap="square" rtlCol="0" anchor="ctr"/>
+          <a:bodyPr wrap="square" rtlCol="0" anchor="ctr">
+            <a:normAutofit/>
+          </a:bodyPr>
           <a:lstStyle/>
           <a:p>
             <a:pPr indent="0" marL="0">
@@ -5922,7 +6130,9 @@
           <a:ln/>
         </p:spPr>
         <p:txBody>
-          <a:bodyPr wrap="square" rtlCol="0" anchor="ctr"/>
+          <a:bodyPr wrap="square" rtlCol="0" anchor="ctr">
+            <a:normAutofit/>
+          </a:bodyPr>
           <a:lstStyle/>
           <a:p>
             <a:pPr indent="0" marL="0">
@@ -5970,7 +6180,9 @@
           </a:ln>
         </p:spPr>
         <p:txBody>
-          <a:bodyPr/>
+          <a:bodyPr wrap="square">
+            <a:normAutofit/>
+          </a:bodyPr>
           <a:p/>
         </p:txBody>
       </p:sp>
@@ -5992,7 +6204,9 @@
           <a:ln/>
         </p:spPr>
         <p:txBody>
-          <a:bodyPr wrap="square" rtlCol="0" anchor="ctr"/>
+          <a:bodyPr wrap="square" rtlCol="0" anchor="ctr">
+            <a:normAutofit/>
+          </a:bodyPr>
           <a:lstStyle/>
           <a:p>
             <a:pPr indent="0" marL="0">
@@ -6031,7 +6245,9 @@
           <a:ln/>
         </p:spPr>
         <p:txBody>
-          <a:bodyPr wrap="square" rtlCol="0" anchor="ctr"/>
+          <a:bodyPr wrap="square" rtlCol="0" anchor="ctr">
+            <a:normAutofit/>
+          </a:bodyPr>
           <a:lstStyle/>
           <a:p>
             <a:pPr indent="0" marL="0">
@@ -6070,7 +6286,9 @@
           <a:ln/>
         </p:spPr>
         <p:txBody>
-          <a:bodyPr wrap="square" rtlCol="0" anchor="t"/>
+          <a:bodyPr wrap="square" rtlCol="0" anchor="t">
+            <a:normAutofit/>
+          </a:bodyPr>
           <a:lstStyle/>
           <a:p>
             <a:pPr indent="0" marL="0">
@@ -6109,7 +6327,9 @@
           <a:ln/>
         </p:spPr>
         <p:txBody>
-          <a:bodyPr wrap="square" rtlCol="0" anchor="ctr"/>
+          <a:bodyPr wrap="square" rtlCol="0" anchor="ctr">
+            <a:normAutofit/>
+          </a:bodyPr>
           <a:lstStyle/>
           <a:p>
             <a:pPr indent="0" marL="0">
@@ -6148,7 +6368,9 @@
           <a:ln/>
         </p:spPr>
         <p:txBody>
-          <a:bodyPr wrap="square" rtlCol="0" anchor="t"/>
+          <a:bodyPr wrap="square" rtlCol="0" anchor="t">
+            <a:normAutofit/>
+          </a:bodyPr>
           <a:lstStyle/>
           <a:p>
             <a:pPr indent="0" marL="0">
@@ -6187,7 +6409,9 @@
           <a:ln/>
         </p:spPr>
         <p:txBody>
-          <a:bodyPr wrap="square" rtlCol="0" anchor="ctr"/>
+          <a:bodyPr wrap="square" rtlCol="0" anchor="ctr">
+            <a:normAutofit/>
+          </a:bodyPr>
           <a:lstStyle/>
           <a:p>
             <a:pPr indent="0" marL="0">
@@ -6226,7 +6450,9 @@
           <a:ln/>
         </p:spPr>
         <p:txBody>
-          <a:bodyPr wrap="square" rtlCol="0" anchor="t"/>
+          <a:bodyPr wrap="square" rtlCol="0" anchor="t">
+            <a:normAutofit/>
+          </a:bodyPr>
           <a:lstStyle/>
           <a:p>
             <a:pPr indent="0" marL="0">
@@ -6274,7 +6500,9 @@
           </a:ln>
         </p:spPr>
         <p:txBody>
-          <a:bodyPr/>
+          <a:bodyPr wrap="square">
+            <a:normAutofit/>
+          </a:bodyPr>
           <a:p/>
         </p:txBody>
       </p:sp>
@@ -6296,7 +6524,9 @@
           <a:ln/>
         </p:spPr>
         <p:txBody>
-          <a:bodyPr wrap="square" rtlCol="0" anchor="ctr"/>
+          <a:bodyPr wrap="square" rtlCol="0" anchor="ctr">
+            <a:normAutofit/>
+          </a:bodyPr>
           <a:lstStyle/>
           <a:p>
             <a:pPr indent="0" marL="0">
@@ -6335,7 +6565,9 @@
           <a:ln/>
         </p:spPr>
         <p:txBody>
-          <a:bodyPr wrap="square" rtlCol="0" anchor="t"/>
+          <a:bodyPr wrap="square" rtlCol="0" anchor="t">
+            <a:normAutofit/>
+          </a:bodyPr>
           <a:lstStyle/>
           <a:p>
             <a:pPr indent="0" marL="0">
@@ -6374,7 +6606,9 @@
           <a:ln/>
         </p:spPr>
         <p:txBody>
-          <a:bodyPr wrap="square" rtlCol="0" anchor="t"/>
+          <a:bodyPr wrap="square" rtlCol="0" anchor="t">
+            <a:normAutofit/>
+          </a:bodyPr>
           <a:lstStyle/>
           <a:p>
             <a:pPr indent="0" marL="0">
@@ -6413,7 +6647,9 @@
           <a:ln/>
         </p:spPr>
         <p:txBody>
-          <a:bodyPr wrap="square" rtlCol="0" anchor="t"/>
+          <a:bodyPr wrap="square" rtlCol="0" anchor="t">
+            <a:normAutofit/>
+          </a:bodyPr>
           <a:lstStyle/>
           <a:p>
             <a:pPr indent="0" marL="0">
@@ -6452,7 +6688,9 @@
           <a:ln/>
         </p:spPr>
         <p:txBody>
-          <a:bodyPr wrap="square" rtlCol="0" anchor="ctr"/>
+          <a:bodyPr wrap="square" rtlCol="0" anchor="ctr">
+            <a:normAutofit/>
+          </a:bodyPr>
           <a:lstStyle/>
           <a:p>
             <a:pPr algn="r" indent="0" marL="0">
@@ -6523,7 +6761,9 @@
           </a:ln>
         </p:spPr>
         <p:txBody>
-          <a:bodyPr/>
+          <a:bodyPr wrap="square">
+            <a:normAutofit/>
+          </a:bodyPr>
           <a:p/>
         </p:txBody>
       </p:sp>
@@ -6552,7 +6792,9 @@
           </a:ln>
         </p:spPr>
         <p:txBody>
-          <a:bodyPr/>
+          <a:bodyPr wrap="square">
+            <a:normAutofit/>
+          </a:bodyPr>
           <a:p/>
         </p:txBody>
       </p:sp>
@@ -6583,7 +6825,9 @@
           </a:ln>
         </p:spPr>
         <p:txBody>
-          <a:bodyPr/>
+          <a:bodyPr wrap="square">
+            <a:normAutofit/>
+          </a:bodyPr>
           <a:p/>
         </p:txBody>
       </p:sp>
@@ -6605,7 +6849,9 @@
           <a:ln/>
         </p:spPr>
         <p:txBody>
-          <a:bodyPr wrap="square" rtlCol="0" anchor="ctr"/>
+          <a:bodyPr wrap="square" rtlCol="0" anchor="ctr">
+            <a:normAutofit/>
+          </a:bodyPr>
           <a:lstStyle/>
           <a:p>
             <a:pPr algn="ctr" indent="0" marL="0">
@@ -6644,7 +6890,9 @@
           <a:ln/>
         </p:spPr>
         <p:txBody>
-          <a:bodyPr wrap="square" rtlCol="0" anchor="ctr"/>
+          <a:bodyPr wrap="square" rtlCol="0" anchor="ctr">
+            <a:normAutofit/>
+          </a:bodyPr>
           <a:lstStyle/>
           <a:p>
             <a:pPr indent="0" marL="0">
@@ -6683,7 +6931,9 @@
           <a:ln/>
         </p:spPr>
         <p:txBody>
-          <a:bodyPr wrap="square" rtlCol="0" anchor="ctr"/>
+          <a:bodyPr wrap="square" rtlCol="0" anchor="ctr">
+            <a:normAutofit/>
+          </a:bodyPr>
           <a:lstStyle/>
           <a:p>
             <a:pPr indent="0" marL="0">
@@ -6731,7 +6981,9 @@
           </a:ln>
         </p:spPr>
         <p:txBody>
-          <a:bodyPr/>
+          <a:bodyPr wrap="square">
+            <a:normAutofit/>
+          </a:bodyPr>
           <a:p/>
         </p:txBody>
       </p:sp>
@@ -6753,7 +7005,9 @@
           <a:ln/>
         </p:spPr>
         <p:txBody>
-          <a:bodyPr wrap="square" rtlCol="0" anchor="ctr"/>
+          <a:bodyPr wrap="square" rtlCol="0" anchor="ctr">
+            <a:normAutofit/>
+          </a:bodyPr>
           <a:lstStyle/>
           <a:p>
             <a:pPr indent="0" marL="0">
@@ -6792,7 +7046,9 @@
           <a:ln/>
         </p:spPr>
         <p:txBody>
-          <a:bodyPr wrap="square" rtlCol="0" anchor="ctr"/>
+          <a:bodyPr wrap="square" rtlCol="0" anchor="ctr">
+            <a:normAutofit/>
+          </a:bodyPr>
           <a:lstStyle/>
           <a:p>
             <a:pPr indent="0" marL="0">
@@ -6831,7 +7087,9 @@
           <a:ln/>
         </p:spPr>
         <p:txBody>
-          <a:bodyPr wrap="square" rtlCol="0" anchor="t"/>
+          <a:bodyPr wrap="square" rtlCol="0" anchor="t">
+            <a:normAutofit/>
+          </a:bodyPr>
           <a:lstStyle/>
           <a:p>
             <a:pPr indent="0" marL="0">
@@ -6870,7 +7128,9 @@
           <a:ln/>
         </p:spPr>
         <p:txBody>
-          <a:bodyPr wrap="square" rtlCol="0" anchor="ctr"/>
+          <a:bodyPr wrap="square" rtlCol="0" anchor="ctr">
+            <a:normAutofit/>
+          </a:bodyPr>
           <a:lstStyle/>
           <a:p>
             <a:pPr indent="0" marL="0">
@@ -6909,7 +7169,9 @@
           <a:ln/>
         </p:spPr>
         <p:txBody>
-          <a:bodyPr wrap="square" rtlCol="0" anchor="t"/>
+          <a:bodyPr wrap="square" rtlCol="0" anchor="t">
+            <a:normAutofit/>
+          </a:bodyPr>
           <a:lstStyle/>
           <a:p>
             <a:pPr indent="0" marL="0">
@@ -6948,7 +7210,9 @@
           <a:ln/>
         </p:spPr>
         <p:txBody>
-          <a:bodyPr wrap="square" rtlCol="0" anchor="ctr"/>
+          <a:bodyPr wrap="square" rtlCol="0" anchor="ctr">
+            <a:normAutofit/>
+          </a:bodyPr>
           <a:lstStyle/>
           <a:p>
             <a:pPr indent="0" marL="0">
@@ -6987,7 +7251,9 @@
           <a:ln/>
         </p:spPr>
         <p:txBody>
-          <a:bodyPr wrap="square" rtlCol="0" anchor="t"/>
+          <a:bodyPr wrap="square" rtlCol="0" anchor="t">
+            <a:normAutofit/>
+          </a:bodyPr>
           <a:lstStyle/>
           <a:p>
             <a:pPr indent="0" marL="0">
@@ -7035,7 +7301,9 @@
           </a:ln>
         </p:spPr>
         <p:txBody>
-          <a:bodyPr/>
+          <a:bodyPr wrap="square">
+            <a:normAutofit/>
+          </a:bodyPr>
           <a:p/>
         </p:txBody>
       </p:sp>
@@ -7057,7 +7325,9 @@
           <a:ln/>
         </p:spPr>
         <p:txBody>
-          <a:bodyPr wrap="square" rtlCol="0" anchor="ctr"/>
+          <a:bodyPr wrap="square" rtlCol="0" anchor="ctr">
+            <a:normAutofit/>
+          </a:bodyPr>
           <a:lstStyle/>
           <a:p>
             <a:pPr indent="0" marL="0">
@@ -7096,7 +7366,9 @@
           <a:ln/>
         </p:spPr>
         <p:txBody>
-          <a:bodyPr wrap="square" rtlCol="0" anchor="t"/>
+          <a:bodyPr wrap="square" rtlCol="0" anchor="t">
+            <a:normAutofit/>
+          </a:bodyPr>
           <a:lstStyle/>
           <a:p>
             <a:pPr indent="0" marL="0">
@@ -7135,7 +7407,9 @@
           <a:ln/>
         </p:spPr>
         <p:txBody>
-          <a:bodyPr wrap="square" rtlCol="0" anchor="t"/>
+          <a:bodyPr wrap="square" rtlCol="0" anchor="t">
+            <a:normAutofit/>
+          </a:bodyPr>
           <a:lstStyle/>
           <a:p>
             <a:pPr indent="0" marL="0">
@@ -7174,7 +7448,9 @@
           <a:ln/>
         </p:spPr>
         <p:txBody>
-          <a:bodyPr wrap="square" rtlCol="0" anchor="t"/>
+          <a:bodyPr wrap="square" rtlCol="0" anchor="t">
+            <a:normAutofit/>
+          </a:bodyPr>
           <a:lstStyle/>
           <a:p>
             <a:pPr indent="0" marL="0">
@@ -7213,7 +7489,9 @@
           <a:ln/>
         </p:spPr>
         <p:txBody>
-          <a:bodyPr wrap="square" rtlCol="0" anchor="ctr"/>
+          <a:bodyPr wrap="square" rtlCol="0" anchor="ctr">
+            <a:normAutofit/>
+          </a:bodyPr>
           <a:lstStyle/>
           <a:p>
             <a:pPr algn="r" indent="0" marL="0">

--- a/pptx_sessions_8_22/第22回_基礎編_講師用.pptx
+++ b/pptx_sessions_8_22/第22回_基礎編_講師用.pptx
@@ -1531,9 +1531,7 @@
           </a:ln>
         </p:spPr>
         <p:txBody>
-          <a:bodyPr wrap="square">
-            <a:normAutofit/>
-          </a:bodyPr>
+          <a:bodyPr/>
           <a:p/>
         </p:txBody>
       </p:sp>
@@ -1562,9 +1560,7 @@
           </a:ln>
         </p:spPr>
         <p:txBody>
-          <a:bodyPr wrap="square">
-            <a:normAutofit/>
-          </a:bodyPr>
+          <a:bodyPr/>
           <a:p/>
         </p:txBody>
       </p:sp>
@@ -1586,9 +1582,7 @@
           <a:ln/>
         </p:spPr>
         <p:txBody>
-          <a:bodyPr wrap="square" rtlCol="0" anchor="ctr">
-            <a:normAutofit/>
-          </a:bodyPr>
+          <a:bodyPr wrap="square" rtlCol="0" anchor="ctr"/>
           <a:lstStyle/>
           <a:p>
             <a:pPr algn="ctr" indent="0" marL="0">
@@ -1627,9 +1621,7 @@
           <a:ln/>
         </p:spPr>
         <p:txBody>
-          <a:bodyPr wrap="square" rtlCol="0" anchor="ctr">
-            <a:normAutofit/>
-          </a:bodyPr>
+          <a:bodyPr wrap="square" rtlCol="0" anchor="ctr"/>
           <a:lstStyle/>
           <a:p>
             <a:pPr algn="ctr" indent="0" marL="0">
@@ -1668,9 +1660,7 @@
           <a:ln/>
         </p:spPr>
         <p:txBody>
-          <a:bodyPr wrap="square" rtlCol="0" anchor="ctr">
-            <a:normAutofit/>
-          </a:bodyPr>
+          <a:bodyPr wrap="square" rtlCol="0" anchor="ctr"/>
           <a:lstStyle/>
           <a:p>
             <a:pPr algn="ctr" indent="0" marL="0">
@@ -1709,9 +1699,7 @@
           <a:ln/>
         </p:spPr>
         <p:txBody>
-          <a:bodyPr wrap="square" rtlCol="0" anchor="ctr">
-            <a:normAutofit/>
-          </a:bodyPr>
+          <a:bodyPr wrap="square" rtlCol="0" anchor="ctr"/>
           <a:lstStyle/>
           <a:p>
             <a:pPr algn="ctr" indent="0" marL="0">
@@ -1759,9 +1747,7 @@
           </a:ln>
         </p:spPr>
         <p:txBody>
-          <a:bodyPr wrap="square">
-            <a:normAutofit/>
-          </a:bodyPr>
+          <a:bodyPr/>
           <a:p/>
         </p:txBody>
       </p:sp>
@@ -1783,9 +1769,7 @@
           <a:ln/>
         </p:spPr>
         <p:txBody>
-          <a:bodyPr wrap="square" rtlCol="0" anchor="ctr">
-            <a:normAutofit/>
-          </a:bodyPr>
+          <a:bodyPr wrap="square" rtlCol="0" anchor="ctr"/>
           <a:lstStyle/>
           <a:p>
             <a:pPr algn="ctr" indent="0" marL="0">
@@ -1856,9 +1840,7 @@
           </a:ln>
         </p:spPr>
         <p:txBody>
-          <a:bodyPr wrap="square">
-            <a:normAutofit/>
-          </a:bodyPr>
+          <a:bodyPr/>
           <a:p/>
         </p:txBody>
       </p:sp>
@@ -1887,9 +1869,7 @@
           </a:ln>
         </p:spPr>
         <p:txBody>
-          <a:bodyPr wrap="square">
-            <a:normAutofit/>
-          </a:bodyPr>
+          <a:bodyPr/>
           <a:p/>
         </p:txBody>
       </p:sp>
@@ -1911,9 +1891,7 @@
           <a:ln/>
         </p:spPr>
         <p:txBody>
-          <a:bodyPr wrap="square" rtlCol="0" anchor="ctr">
-            <a:normAutofit/>
-          </a:bodyPr>
+          <a:bodyPr wrap="square" rtlCol="0" anchor="ctr"/>
           <a:lstStyle/>
           <a:p>
             <a:pPr indent="0" marL="0">
@@ -1952,9 +1930,7 @@
           <a:ln/>
         </p:spPr>
         <p:txBody>
-          <a:bodyPr wrap="square" rtlCol="0" anchor="ctr">
-            <a:normAutofit/>
-          </a:bodyPr>
+          <a:bodyPr wrap="square" rtlCol="0" anchor="ctr"/>
           <a:lstStyle/>
           <a:p>
             <a:pPr indent="0" marL="0">
@@ -2002,9 +1978,7 @@
           </a:ln>
         </p:spPr>
         <p:txBody>
-          <a:bodyPr wrap="square">
-            <a:normAutofit/>
-          </a:bodyPr>
+          <a:bodyPr/>
           <a:p/>
         </p:txBody>
       </p:sp>
@@ -2026,9 +2000,7 @@
           <a:ln/>
         </p:spPr>
         <p:txBody>
-          <a:bodyPr wrap="square" rtlCol="0" anchor="ctr">
-            <a:normAutofit/>
-          </a:bodyPr>
+          <a:bodyPr wrap="square" rtlCol="0" anchor="ctr"/>
           <a:lstStyle/>
           <a:p>
             <a:pPr indent="0" marL="0">
@@ -2067,9 +2039,7 @@
           <a:ln/>
         </p:spPr>
         <p:txBody>
-          <a:bodyPr wrap="square" rtlCol="0" anchor="ctr">
-            <a:normAutofit/>
-          </a:bodyPr>
+          <a:bodyPr wrap="square" rtlCol="0" anchor="ctr"/>
           <a:lstStyle/>
           <a:p>
             <a:pPr indent="0" marL="0">
@@ -2108,9 +2078,7 @@
           <a:ln/>
         </p:spPr>
         <p:txBody>
-          <a:bodyPr wrap="square" rtlCol="0" anchor="ctr">
-            <a:normAutofit/>
-          </a:bodyPr>
+          <a:bodyPr wrap="square" rtlCol="0" anchor="ctr"/>
           <a:lstStyle/>
           <a:p>
             <a:pPr indent="0" marL="0">
@@ -2158,9 +2126,7 @@
           </a:ln>
         </p:spPr>
         <p:txBody>
-          <a:bodyPr wrap="square">
-            <a:normAutofit/>
-          </a:bodyPr>
+          <a:bodyPr/>
           <a:p/>
         </p:txBody>
       </p:sp>
@@ -2182,9 +2148,7 @@
           <a:ln/>
         </p:spPr>
         <p:txBody>
-          <a:bodyPr wrap="square" rtlCol="0" anchor="ctr">
-            <a:normAutofit/>
-          </a:bodyPr>
+          <a:bodyPr wrap="square" rtlCol="0" anchor="ctr"/>
           <a:lstStyle/>
           <a:p>
             <a:pPr indent="0" marL="0">
@@ -2223,9 +2187,7 @@
           <a:ln/>
         </p:spPr>
         <p:txBody>
-          <a:bodyPr wrap="square" rtlCol="0" anchor="ctr">
-            <a:normAutofit/>
-          </a:bodyPr>
+          <a:bodyPr wrap="square" rtlCol="0" anchor="ctr"/>
           <a:lstStyle/>
           <a:p>
             <a:pPr indent="0" marL="0">
@@ -2264,9 +2226,7 @@
           <a:ln/>
         </p:spPr>
         <p:txBody>
-          <a:bodyPr wrap="square" rtlCol="0" anchor="ctr">
-            <a:normAutofit/>
-          </a:bodyPr>
+          <a:bodyPr wrap="square" rtlCol="0" anchor="ctr"/>
           <a:lstStyle/>
           <a:p>
             <a:pPr indent="0" marL="0">
@@ -2314,9 +2274,7 @@
           </a:ln>
         </p:spPr>
         <p:txBody>
-          <a:bodyPr wrap="square">
-            <a:normAutofit/>
-          </a:bodyPr>
+          <a:bodyPr/>
           <a:p/>
         </p:txBody>
       </p:sp>
@@ -2338,9 +2296,7 @@
           <a:ln/>
         </p:spPr>
         <p:txBody>
-          <a:bodyPr wrap="square" rtlCol="0" anchor="ctr">
-            <a:normAutofit/>
-          </a:bodyPr>
+          <a:bodyPr wrap="square" rtlCol="0" anchor="ctr"/>
           <a:lstStyle/>
           <a:p>
             <a:pPr indent="0" marL="0">
@@ -2379,9 +2335,7 @@
           <a:ln/>
         </p:spPr>
         <p:txBody>
-          <a:bodyPr wrap="square" rtlCol="0" anchor="ctr">
-            <a:normAutofit/>
-          </a:bodyPr>
+          <a:bodyPr wrap="square" rtlCol="0" anchor="ctr"/>
           <a:lstStyle/>
           <a:p>
             <a:pPr indent="0" marL="0">
@@ -2420,9 +2374,7 @@
           <a:ln/>
         </p:spPr>
         <p:txBody>
-          <a:bodyPr wrap="square" rtlCol="0" anchor="ctr">
-            <a:normAutofit/>
-          </a:bodyPr>
+          <a:bodyPr wrap="square" rtlCol="0" anchor="ctr"/>
           <a:lstStyle/>
           <a:p>
             <a:pPr indent="0" marL="0">
@@ -2461,9 +2413,7 @@
           <a:ln/>
         </p:spPr>
         <p:txBody>
-          <a:bodyPr wrap="square" rtlCol="0" anchor="ctr">
-            <a:normAutofit/>
-          </a:bodyPr>
+          <a:bodyPr wrap="square" rtlCol="0" anchor="ctr"/>
           <a:lstStyle/>
           <a:p>
             <a:pPr algn="r" indent="0" marL="0">
@@ -2534,9 +2484,7 @@
           </a:ln>
         </p:spPr>
         <p:txBody>
-          <a:bodyPr wrap="square">
-            <a:normAutofit/>
-          </a:bodyPr>
+          <a:bodyPr/>
           <a:p/>
         </p:txBody>
       </p:sp>
@@ -2565,9 +2513,7 @@
           </a:ln>
         </p:spPr>
         <p:txBody>
-          <a:bodyPr wrap="square">
-            <a:normAutofit/>
-          </a:bodyPr>
+          <a:bodyPr/>
           <a:p/>
         </p:txBody>
       </p:sp>
@@ -2589,9 +2535,7 @@
           <a:ln/>
         </p:spPr>
         <p:txBody>
-          <a:bodyPr wrap="square" rtlCol="0" anchor="ctr">
-            <a:normAutofit/>
-          </a:bodyPr>
+          <a:bodyPr wrap="square" rtlCol="0" anchor="ctr"/>
           <a:lstStyle/>
           <a:p>
             <a:pPr indent="0" marL="0">
@@ -2630,9 +2574,7 @@
           <a:ln/>
         </p:spPr>
         <p:txBody>
-          <a:bodyPr wrap="square" rtlCol="0" anchor="ctr">
-            <a:normAutofit/>
-          </a:bodyPr>
+          <a:bodyPr wrap="square" rtlCol="0" anchor="ctr"/>
           <a:lstStyle/>
           <a:p>
             <a:pPr indent="0" marL="0">
@@ -2678,9 +2620,7 @@
           </a:ln>
         </p:spPr>
         <p:txBody>
-          <a:bodyPr wrap="square">
-            <a:normAutofit/>
-          </a:bodyPr>
+          <a:bodyPr/>
           <a:p/>
         </p:txBody>
       </p:sp>
@@ -2711,9 +2651,7 @@
           </a:ln>
         </p:spPr>
         <p:txBody>
-          <a:bodyPr wrap="square">
-            <a:normAutofit/>
-          </a:bodyPr>
+          <a:bodyPr/>
           <a:p/>
         </p:txBody>
       </p:sp>
@@ -2735,9 +2673,7 @@
           <a:ln/>
         </p:spPr>
         <p:txBody>
-          <a:bodyPr wrap="square" rtlCol="0" anchor="ctr">
-            <a:normAutofit/>
-          </a:bodyPr>
+          <a:bodyPr wrap="square" rtlCol="0" anchor="ctr"/>
           <a:lstStyle/>
           <a:p>
             <a:pPr algn="ctr" indent="0" marL="0">
@@ -2776,9 +2712,7 @@
           <a:ln/>
         </p:spPr>
         <p:txBody>
-          <a:bodyPr wrap="square" rtlCol="0" anchor="ctr">
-            <a:normAutofit/>
-          </a:bodyPr>
+          <a:bodyPr wrap="square" rtlCol="0" anchor="ctr"/>
           <a:lstStyle/>
           <a:p>
             <a:pPr indent="0" marL="0">
@@ -2824,9 +2758,7 @@
           </a:ln>
         </p:spPr>
         <p:txBody>
-          <a:bodyPr wrap="square">
-            <a:normAutofit/>
-          </a:bodyPr>
+          <a:bodyPr/>
           <a:p/>
         </p:txBody>
       </p:sp>
@@ -2857,9 +2789,7 @@
           </a:ln>
         </p:spPr>
         <p:txBody>
-          <a:bodyPr wrap="square">
-            <a:normAutofit/>
-          </a:bodyPr>
+          <a:bodyPr/>
           <a:p/>
         </p:txBody>
       </p:sp>
@@ -2881,9 +2811,7 @@
           <a:ln/>
         </p:spPr>
         <p:txBody>
-          <a:bodyPr wrap="square" rtlCol="0" anchor="ctr">
-            <a:normAutofit/>
-          </a:bodyPr>
+          <a:bodyPr wrap="square" rtlCol="0" anchor="ctr"/>
           <a:lstStyle/>
           <a:p>
             <a:pPr algn="ctr" indent="0" marL="0">
@@ -2922,9 +2850,7 @@
           <a:ln/>
         </p:spPr>
         <p:txBody>
-          <a:bodyPr wrap="square" rtlCol="0" anchor="ctr">
-            <a:normAutofit/>
-          </a:bodyPr>
+          <a:bodyPr wrap="square" rtlCol="0" anchor="ctr"/>
           <a:lstStyle/>
           <a:p>
             <a:pPr indent="0" marL="0">
@@ -2963,9 +2889,7 @@
           <a:ln/>
         </p:spPr>
         <p:txBody>
-          <a:bodyPr wrap="square" rtlCol="0" anchor="ctr">
-            <a:normAutofit/>
-          </a:bodyPr>
+          <a:bodyPr wrap="square" rtlCol="0" anchor="ctr"/>
           <a:lstStyle/>
           <a:p>
             <a:pPr indent="0" marL="0">
@@ -3013,9 +2937,7 @@
           </a:ln>
         </p:spPr>
         <p:txBody>
-          <a:bodyPr wrap="square">
-            <a:normAutofit/>
-          </a:bodyPr>
+          <a:bodyPr/>
           <a:p/>
         </p:txBody>
       </p:sp>
@@ -3046,9 +2968,7 @@
           </a:ln>
         </p:spPr>
         <p:txBody>
-          <a:bodyPr wrap="square">
-            <a:normAutofit/>
-          </a:bodyPr>
+          <a:bodyPr/>
           <a:p/>
         </p:txBody>
       </p:sp>
@@ -3070,9 +2990,7 @@
           <a:ln/>
         </p:spPr>
         <p:txBody>
-          <a:bodyPr wrap="square" rtlCol="0" anchor="ctr">
-            <a:normAutofit/>
-          </a:bodyPr>
+          <a:bodyPr wrap="square" rtlCol="0" anchor="ctr"/>
           <a:lstStyle/>
           <a:p>
             <a:pPr algn="ctr" indent="0" marL="0">
@@ -3111,9 +3029,7 @@
           <a:ln/>
         </p:spPr>
         <p:txBody>
-          <a:bodyPr wrap="square" rtlCol="0" anchor="ctr">
-            <a:normAutofit/>
-          </a:bodyPr>
+          <a:bodyPr wrap="square" rtlCol="0" anchor="ctr"/>
           <a:lstStyle/>
           <a:p>
             <a:pPr indent="0" marL="0">
@@ -3161,9 +3077,7 @@
           </a:ln>
         </p:spPr>
         <p:txBody>
-          <a:bodyPr wrap="square">
-            <a:normAutofit/>
-          </a:bodyPr>
+          <a:bodyPr/>
           <a:p/>
         </p:txBody>
       </p:sp>
@@ -3194,9 +3108,7 @@
           </a:ln>
         </p:spPr>
         <p:txBody>
-          <a:bodyPr wrap="square">
-            <a:normAutofit/>
-          </a:bodyPr>
+          <a:bodyPr/>
           <a:p/>
         </p:txBody>
       </p:sp>
@@ -3218,9 +3130,7 @@
           <a:ln/>
         </p:spPr>
         <p:txBody>
-          <a:bodyPr wrap="square" rtlCol="0" anchor="ctr">
-            <a:normAutofit/>
-          </a:bodyPr>
+          <a:bodyPr wrap="square" rtlCol="0" anchor="ctr"/>
           <a:lstStyle/>
           <a:p>
             <a:pPr algn="ctr" indent="0" marL="0">
@@ -3259,9 +3169,7 @@
           <a:ln/>
         </p:spPr>
         <p:txBody>
-          <a:bodyPr wrap="square" rtlCol="0" anchor="ctr">
-            <a:normAutofit/>
-          </a:bodyPr>
+          <a:bodyPr wrap="square" rtlCol="0" anchor="ctr"/>
           <a:lstStyle/>
           <a:p>
             <a:pPr indent="0" marL="0">
@@ -3309,9 +3217,7 @@
           </a:ln>
         </p:spPr>
         <p:txBody>
-          <a:bodyPr wrap="square">
-            <a:normAutofit/>
-          </a:bodyPr>
+          <a:bodyPr/>
           <a:p/>
         </p:txBody>
       </p:sp>
@@ -3342,9 +3248,7 @@
           </a:ln>
         </p:spPr>
         <p:txBody>
-          <a:bodyPr wrap="square">
-            <a:normAutofit/>
-          </a:bodyPr>
+          <a:bodyPr/>
           <a:p/>
         </p:txBody>
       </p:sp>
@@ -3366,9 +3270,7 @@
           <a:ln/>
         </p:spPr>
         <p:txBody>
-          <a:bodyPr wrap="square" rtlCol="0" anchor="ctr">
-            <a:normAutofit/>
-          </a:bodyPr>
+          <a:bodyPr wrap="square" rtlCol="0" anchor="ctr"/>
           <a:lstStyle/>
           <a:p>
             <a:pPr algn="ctr" indent="0" marL="0">
@@ -3407,9 +3309,7 @@
           <a:ln/>
         </p:spPr>
         <p:txBody>
-          <a:bodyPr wrap="square" rtlCol="0" anchor="ctr">
-            <a:normAutofit/>
-          </a:bodyPr>
+          <a:bodyPr wrap="square" rtlCol="0" anchor="ctr"/>
           <a:lstStyle/>
           <a:p>
             <a:pPr indent="0" marL="0">
@@ -3457,9 +3357,7 @@
           </a:ln>
         </p:spPr>
         <p:txBody>
-          <a:bodyPr wrap="square">
-            <a:normAutofit/>
-          </a:bodyPr>
+          <a:bodyPr/>
           <a:p/>
         </p:txBody>
       </p:sp>
@@ -3490,9 +3388,7 @@
           </a:ln>
         </p:spPr>
         <p:txBody>
-          <a:bodyPr wrap="square">
-            <a:normAutofit/>
-          </a:bodyPr>
+          <a:bodyPr/>
           <a:p/>
         </p:txBody>
       </p:sp>
@@ -3514,9 +3410,7 @@
           <a:ln/>
         </p:spPr>
         <p:txBody>
-          <a:bodyPr wrap="square" rtlCol="0" anchor="ctr">
-            <a:normAutofit/>
-          </a:bodyPr>
+          <a:bodyPr wrap="square" rtlCol="0" anchor="ctr"/>
           <a:lstStyle/>
           <a:p>
             <a:pPr algn="ctr" indent="0" marL="0">
@@ -3555,9 +3449,7 @@
           <a:ln/>
         </p:spPr>
         <p:txBody>
-          <a:bodyPr wrap="square" rtlCol="0" anchor="ctr">
-            <a:normAutofit/>
-          </a:bodyPr>
+          <a:bodyPr wrap="square" rtlCol="0" anchor="ctr"/>
           <a:lstStyle/>
           <a:p>
             <a:pPr indent="0" marL="0">
@@ -3605,9 +3497,7 @@
           </a:ln>
         </p:spPr>
         <p:txBody>
-          <a:bodyPr wrap="square">
-            <a:normAutofit/>
-          </a:bodyPr>
+          <a:bodyPr/>
           <a:p/>
         </p:txBody>
       </p:sp>
@@ -3638,9 +3528,7 @@
           </a:ln>
         </p:spPr>
         <p:txBody>
-          <a:bodyPr wrap="square">
-            <a:normAutofit/>
-          </a:bodyPr>
+          <a:bodyPr/>
           <a:p/>
         </p:txBody>
       </p:sp>
@@ -3662,9 +3550,7 @@
           <a:ln/>
         </p:spPr>
         <p:txBody>
-          <a:bodyPr wrap="square" rtlCol="0" anchor="ctr">
-            <a:normAutofit/>
-          </a:bodyPr>
+          <a:bodyPr wrap="square" rtlCol="0" anchor="ctr"/>
           <a:lstStyle/>
           <a:p>
             <a:pPr algn="ctr" indent="0" marL="0">
@@ -3703,9 +3589,7 @@
           <a:ln/>
         </p:spPr>
         <p:txBody>
-          <a:bodyPr wrap="square" rtlCol="0" anchor="ctr">
-            <a:normAutofit/>
-          </a:bodyPr>
+          <a:bodyPr wrap="square" rtlCol="0" anchor="ctr"/>
           <a:lstStyle/>
           <a:p>
             <a:pPr indent="0" marL="0">
@@ -3744,9 +3628,7 @@
           <a:ln/>
         </p:spPr>
         <p:txBody>
-          <a:bodyPr wrap="square" rtlCol="0" anchor="ctr">
-            <a:normAutofit/>
-          </a:bodyPr>
+          <a:bodyPr wrap="square" rtlCol="0" anchor="ctr"/>
           <a:lstStyle/>
           <a:p>
             <a:pPr algn="r" indent="0" marL="0">
@@ -3817,9 +3699,7 @@
           </a:ln>
         </p:spPr>
         <p:txBody>
-          <a:bodyPr wrap="square">
-            <a:normAutofit/>
-          </a:bodyPr>
+          <a:bodyPr/>
           <a:p/>
         </p:txBody>
       </p:sp>
@@ -3848,9 +3728,7 @@
           </a:ln>
         </p:spPr>
         <p:txBody>
-          <a:bodyPr wrap="square">
-            <a:normAutofit/>
-          </a:bodyPr>
+          <a:bodyPr/>
           <a:p/>
         </p:txBody>
       </p:sp>
@@ -3881,9 +3759,7 @@
           </a:ln>
         </p:spPr>
         <p:txBody>
-          <a:bodyPr wrap="square">
-            <a:normAutofit/>
-          </a:bodyPr>
+          <a:bodyPr/>
           <a:p/>
         </p:txBody>
       </p:sp>
@@ -3905,9 +3781,7 @@
           <a:ln/>
         </p:spPr>
         <p:txBody>
-          <a:bodyPr wrap="square" rtlCol="0" anchor="ctr">
-            <a:normAutofit/>
-          </a:bodyPr>
+          <a:bodyPr wrap="square" rtlCol="0" anchor="ctr"/>
           <a:lstStyle/>
           <a:p>
             <a:pPr algn="ctr" indent="0" marL="0">
@@ -3946,9 +3820,7 @@
           <a:ln/>
         </p:spPr>
         <p:txBody>
-          <a:bodyPr wrap="square" rtlCol="0" anchor="ctr">
-            <a:normAutofit/>
-          </a:bodyPr>
+          <a:bodyPr wrap="square" rtlCol="0" anchor="ctr"/>
           <a:lstStyle/>
           <a:p>
             <a:pPr indent="0" marL="0">
@@ -3987,9 +3859,7 @@
           <a:ln/>
         </p:spPr>
         <p:txBody>
-          <a:bodyPr wrap="square" rtlCol="0" anchor="ctr">
-            <a:normAutofit/>
-          </a:bodyPr>
+          <a:bodyPr wrap="square" rtlCol="0" anchor="ctr"/>
           <a:lstStyle/>
           <a:p>
             <a:pPr indent="0" marL="0">
@@ -4037,9 +3907,7 @@
           </a:ln>
         </p:spPr>
         <p:txBody>
-          <a:bodyPr wrap="square">
-            <a:normAutofit/>
-          </a:bodyPr>
+          <a:bodyPr/>
           <a:p/>
         </p:txBody>
       </p:sp>
@@ -4061,9 +3929,7 @@
           <a:ln/>
         </p:spPr>
         <p:txBody>
-          <a:bodyPr wrap="square" rtlCol="0" anchor="ctr">
-            <a:normAutofit/>
-          </a:bodyPr>
+          <a:bodyPr wrap="square" rtlCol="0" anchor="ctr"/>
           <a:lstStyle/>
           <a:p>
             <a:pPr indent="0" marL="0">
@@ -4102,9 +3968,7 @@
           <a:ln/>
         </p:spPr>
         <p:txBody>
-          <a:bodyPr wrap="square" rtlCol="0" anchor="t">
-            <a:normAutofit/>
-          </a:bodyPr>
+          <a:bodyPr wrap="square" rtlCol="0" anchor="t"/>
           <a:lstStyle/>
           <a:p>
             <a:pPr indent="0" marL="0">
@@ -4381,9 +4245,7 @@
           <a:ln/>
         </p:spPr>
         <p:txBody>
-          <a:bodyPr wrap="square" rtlCol="0" anchor="ctr">
-            <a:normAutofit/>
-          </a:bodyPr>
+          <a:bodyPr wrap="square" rtlCol="0" anchor="ctr"/>
           <a:lstStyle/>
           <a:p>
             <a:pPr algn="r" indent="0" marL="0">
@@ -4454,9 +4316,7 @@
           </a:ln>
         </p:spPr>
         <p:txBody>
-          <a:bodyPr wrap="square">
-            <a:normAutofit/>
-          </a:bodyPr>
+          <a:bodyPr/>
           <a:p/>
         </p:txBody>
       </p:sp>
@@ -4485,9 +4345,7 @@
           </a:ln>
         </p:spPr>
         <p:txBody>
-          <a:bodyPr wrap="square">
-            <a:normAutofit/>
-          </a:bodyPr>
+          <a:bodyPr/>
           <a:p/>
         </p:txBody>
       </p:sp>
@@ -4518,9 +4376,7 @@
           </a:ln>
         </p:spPr>
         <p:txBody>
-          <a:bodyPr wrap="square">
-            <a:normAutofit/>
-          </a:bodyPr>
+          <a:bodyPr/>
           <a:p/>
         </p:txBody>
       </p:sp>
@@ -4542,9 +4398,7 @@
           <a:ln/>
         </p:spPr>
         <p:txBody>
-          <a:bodyPr wrap="square" rtlCol="0" anchor="ctr">
-            <a:normAutofit/>
-          </a:bodyPr>
+          <a:bodyPr wrap="square" rtlCol="0" anchor="ctr"/>
           <a:lstStyle/>
           <a:p>
             <a:pPr algn="ctr" indent="0" marL="0">
@@ -4583,9 +4437,7 @@
           <a:ln/>
         </p:spPr>
         <p:txBody>
-          <a:bodyPr wrap="square" rtlCol="0" anchor="ctr">
-            <a:normAutofit/>
-          </a:bodyPr>
+          <a:bodyPr wrap="square" rtlCol="0" anchor="ctr"/>
           <a:lstStyle/>
           <a:p>
             <a:pPr indent="0" marL="0">
@@ -4624,9 +4476,7 @@
           <a:ln/>
         </p:spPr>
         <p:txBody>
-          <a:bodyPr wrap="square" rtlCol="0" anchor="ctr">
-            <a:normAutofit/>
-          </a:bodyPr>
+          <a:bodyPr wrap="square" rtlCol="0" anchor="ctr"/>
           <a:lstStyle/>
           <a:p>
             <a:pPr indent="0" marL="0">
@@ -4674,9 +4524,7 @@
           </a:ln>
         </p:spPr>
         <p:txBody>
-          <a:bodyPr wrap="square">
-            <a:normAutofit/>
-          </a:bodyPr>
+          <a:bodyPr/>
           <a:p/>
         </p:txBody>
       </p:sp>
@@ -4698,9 +4546,7 @@
           <a:ln/>
         </p:spPr>
         <p:txBody>
-          <a:bodyPr wrap="square" rtlCol="0" anchor="ctr">
-            <a:normAutofit/>
-          </a:bodyPr>
+          <a:bodyPr wrap="square" rtlCol="0" anchor="ctr"/>
           <a:lstStyle/>
           <a:p>
             <a:pPr indent="0" marL="0">
@@ -4739,9 +4585,7 @@
           <a:ln/>
         </p:spPr>
         <p:txBody>
-          <a:bodyPr wrap="square" rtlCol="0" anchor="ctr">
-            <a:normAutofit/>
-          </a:bodyPr>
+          <a:bodyPr wrap="square" rtlCol="0" anchor="ctr"/>
           <a:lstStyle/>
           <a:p>
             <a:pPr indent="0" marL="0">
@@ -4780,9 +4624,7 @@
           <a:ln/>
         </p:spPr>
         <p:txBody>
-          <a:bodyPr wrap="square" rtlCol="0" anchor="t">
-            <a:normAutofit/>
-          </a:bodyPr>
+          <a:bodyPr wrap="square" rtlCol="0" anchor="t"/>
           <a:lstStyle/>
           <a:p>
             <a:pPr indent="0" marL="0">
@@ -4821,9 +4663,7 @@
           <a:ln/>
         </p:spPr>
         <p:txBody>
-          <a:bodyPr wrap="square" rtlCol="0" anchor="ctr">
-            <a:normAutofit/>
-          </a:bodyPr>
+          <a:bodyPr wrap="square" rtlCol="0" anchor="ctr"/>
           <a:lstStyle/>
           <a:p>
             <a:pPr indent="0" marL="0">
@@ -4862,9 +4702,7 @@
           <a:ln/>
         </p:spPr>
         <p:txBody>
-          <a:bodyPr wrap="square" rtlCol="0" anchor="t">
-            <a:normAutofit/>
-          </a:bodyPr>
+          <a:bodyPr wrap="square" rtlCol="0" anchor="t"/>
           <a:lstStyle/>
           <a:p>
             <a:pPr indent="0" marL="0">
@@ -4903,9 +4741,7 @@
           <a:ln/>
         </p:spPr>
         <p:txBody>
-          <a:bodyPr wrap="square" rtlCol="0" anchor="ctr">
-            <a:normAutofit/>
-          </a:bodyPr>
+          <a:bodyPr wrap="square" rtlCol="0" anchor="ctr"/>
           <a:lstStyle/>
           <a:p>
             <a:pPr indent="0" marL="0">
@@ -4944,9 +4780,7 @@
           <a:ln/>
         </p:spPr>
         <p:txBody>
-          <a:bodyPr wrap="square" rtlCol="0" anchor="t">
-            <a:normAutofit/>
-          </a:bodyPr>
+          <a:bodyPr wrap="square" rtlCol="0" anchor="t"/>
           <a:lstStyle/>
           <a:p>
             <a:pPr indent="0" marL="0">
@@ -4994,9 +4828,7 @@
           </a:ln>
         </p:spPr>
         <p:txBody>
-          <a:bodyPr wrap="square">
-            <a:normAutofit/>
-          </a:bodyPr>
+          <a:bodyPr/>
           <a:p/>
         </p:txBody>
       </p:sp>
@@ -5018,9 +4850,7 @@
           <a:ln/>
         </p:spPr>
         <p:txBody>
-          <a:bodyPr wrap="square" rtlCol="0" anchor="ctr">
-            <a:normAutofit/>
-          </a:bodyPr>
+          <a:bodyPr wrap="square" rtlCol="0" anchor="ctr"/>
           <a:lstStyle/>
           <a:p>
             <a:pPr indent="0" marL="0">
@@ -5059,9 +4889,7 @@
           <a:ln/>
         </p:spPr>
         <p:txBody>
-          <a:bodyPr wrap="square" rtlCol="0" anchor="t">
-            <a:normAutofit/>
-          </a:bodyPr>
+          <a:bodyPr wrap="square" rtlCol="0" anchor="t"/>
           <a:lstStyle/>
           <a:p>
             <a:pPr indent="0" marL="0">
@@ -5100,9 +4928,7 @@
           <a:ln/>
         </p:spPr>
         <p:txBody>
-          <a:bodyPr wrap="square" rtlCol="0" anchor="t">
-            <a:normAutofit/>
-          </a:bodyPr>
+          <a:bodyPr wrap="square" rtlCol="0" anchor="t"/>
           <a:lstStyle/>
           <a:p>
             <a:pPr indent="0" marL="0">
@@ -5141,9 +4967,7 @@
           <a:ln/>
         </p:spPr>
         <p:txBody>
-          <a:bodyPr wrap="square" rtlCol="0" anchor="t">
-            <a:normAutofit/>
-          </a:bodyPr>
+          <a:bodyPr wrap="square" rtlCol="0" anchor="t"/>
           <a:lstStyle/>
           <a:p>
             <a:pPr indent="0" marL="0">
@@ -5182,9 +5006,7 @@
           <a:ln/>
         </p:spPr>
         <p:txBody>
-          <a:bodyPr wrap="square" rtlCol="0" anchor="ctr">
-            <a:normAutofit/>
-          </a:bodyPr>
+          <a:bodyPr wrap="square" rtlCol="0" anchor="ctr"/>
           <a:lstStyle/>
           <a:p>
             <a:pPr algn="r" indent="0" marL="0">
@@ -5255,9 +5077,7 @@
           </a:ln>
         </p:spPr>
         <p:txBody>
-          <a:bodyPr wrap="square">
-            <a:normAutofit/>
-          </a:bodyPr>
+          <a:bodyPr/>
           <a:p/>
         </p:txBody>
       </p:sp>
@@ -5286,9 +5106,7 @@
           </a:ln>
         </p:spPr>
         <p:txBody>
-          <a:bodyPr wrap="square">
-            <a:normAutofit/>
-          </a:bodyPr>
+          <a:bodyPr/>
           <a:p/>
         </p:txBody>
       </p:sp>
@@ -5319,9 +5137,7 @@
           </a:ln>
         </p:spPr>
         <p:txBody>
-          <a:bodyPr wrap="square">
-            <a:normAutofit/>
-          </a:bodyPr>
+          <a:bodyPr/>
           <a:p/>
         </p:txBody>
       </p:sp>
@@ -5343,9 +5159,7 @@
           <a:ln/>
         </p:spPr>
         <p:txBody>
-          <a:bodyPr wrap="square" rtlCol="0" anchor="ctr">
-            <a:normAutofit/>
-          </a:bodyPr>
+          <a:bodyPr wrap="square" rtlCol="0" anchor="ctr"/>
           <a:lstStyle/>
           <a:p>
             <a:pPr algn="ctr" indent="0" marL="0">
@@ -5384,9 +5198,7 @@
           <a:ln/>
         </p:spPr>
         <p:txBody>
-          <a:bodyPr wrap="square" rtlCol="0" anchor="ctr">
-            <a:normAutofit/>
-          </a:bodyPr>
+          <a:bodyPr wrap="square" rtlCol="0" anchor="ctr"/>
           <a:lstStyle/>
           <a:p>
             <a:pPr indent="0" marL="0">
@@ -5425,9 +5237,7 @@
           <a:ln/>
         </p:spPr>
         <p:txBody>
-          <a:bodyPr wrap="square" rtlCol="0" anchor="ctr">
-            <a:normAutofit/>
-          </a:bodyPr>
+          <a:bodyPr wrap="square" rtlCol="0" anchor="ctr"/>
           <a:lstStyle/>
           <a:p>
             <a:pPr indent="0" marL="0">
@@ -5475,9 +5285,7 @@
           </a:ln>
         </p:spPr>
         <p:txBody>
-          <a:bodyPr wrap="square">
-            <a:normAutofit/>
-          </a:bodyPr>
+          <a:bodyPr/>
           <a:p/>
         </p:txBody>
       </p:sp>
@@ -5499,9 +5307,7 @@
           <a:ln/>
         </p:spPr>
         <p:txBody>
-          <a:bodyPr wrap="square" rtlCol="0" anchor="ctr">
-            <a:normAutofit/>
-          </a:bodyPr>
+          <a:bodyPr wrap="square" rtlCol="0" anchor="ctr"/>
           <a:lstStyle/>
           <a:p>
             <a:pPr indent="0" marL="0">
@@ -5540,9 +5346,7 @@
           <a:ln/>
         </p:spPr>
         <p:txBody>
-          <a:bodyPr wrap="square" rtlCol="0" anchor="t">
-            <a:normAutofit/>
-          </a:bodyPr>
+          <a:bodyPr wrap="square" rtlCol="0" anchor="t"/>
           <a:lstStyle/>
           <a:p>
             <a:pPr indent="0" marL="0">
@@ -5887,9 +5691,7 @@
           <a:ln/>
         </p:spPr>
         <p:txBody>
-          <a:bodyPr wrap="square" rtlCol="0" anchor="ctr">
-            <a:normAutofit/>
-          </a:bodyPr>
+          <a:bodyPr wrap="square" rtlCol="0" anchor="ctr"/>
           <a:lstStyle/>
           <a:p>
             <a:pPr algn="r" indent="0" marL="0">
@@ -5960,9 +5762,7 @@
           </a:ln>
         </p:spPr>
         <p:txBody>
-          <a:bodyPr wrap="square">
-            <a:normAutofit/>
-          </a:bodyPr>
+          <a:bodyPr/>
           <a:p/>
         </p:txBody>
       </p:sp>
@@ -5991,9 +5791,7 @@
           </a:ln>
         </p:spPr>
         <p:txBody>
-          <a:bodyPr wrap="square">
-            <a:normAutofit/>
-          </a:bodyPr>
+          <a:bodyPr/>
           <a:p/>
         </p:txBody>
       </p:sp>
@@ -6024,9 +5822,7 @@
           </a:ln>
         </p:spPr>
         <p:txBody>
-          <a:bodyPr wrap="square">
-            <a:normAutofit/>
-          </a:bodyPr>
+          <a:bodyPr/>
           <a:p/>
         </p:txBody>
       </p:sp>
@@ -6048,9 +5844,7 @@
           <a:ln/>
         </p:spPr>
         <p:txBody>
-          <a:bodyPr wrap="square" rtlCol="0" anchor="ctr">
-            <a:normAutofit/>
-          </a:bodyPr>
+          <a:bodyPr wrap="square" rtlCol="0" anchor="ctr"/>
           <a:lstStyle/>
           <a:p>
             <a:pPr algn="ctr" indent="0" marL="0">
@@ -6089,9 +5883,7 @@
           <a:ln/>
         </p:spPr>
         <p:txBody>
-          <a:bodyPr wrap="square" rtlCol="0" anchor="ctr">
-            <a:normAutofit/>
-          </a:bodyPr>
+          <a:bodyPr wrap="square" rtlCol="0" anchor="ctr"/>
           <a:lstStyle/>
           <a:p>
             <a:pPr indent="0" marL="0">
@@ -6130,9 +5922,7 @@
           <a:ln/>
         </p:spPr>
         <p:txBody>
-          <a:bodyPr wrap="square" rtlCol="0" anchor="ctr">
-            <a:normAutofit/>
-          </a:bodyPr>
+          <a:bodyPr wrap="square" rtlCol="0" anchor="ctr"/>
           <a:lstStyle/>
           <a:p>
             <a:pPr indent="0" marL="0">
@@ -6180,9 +5970,7 @@
           </a:ln>
         </p:spPr>
         <p:txBody>
-          <a:bodyPr wrap="square">
-            <a:normAutofit/>
-          </a:bodyPr>
+          <a:bodyPr/>
           <a:p/>
         </p:txBody>
       </p:sp>
@@ -6204,9 +5992,7 @@
           <a:ln/>
         </p:spPr>
         <p:txBody>
-          <a:bodyPr wrap="square" rtlCol="0" anchor="ctr">
-            <a:normAutofit/>
-          </a:bodyPr>
+          <a:bodyPr wrap="square" rtlCol="0" anchor="ctr"/>
           <a:lstStyle/>
           <a:p>
             <a:pPr indent="0" marL="0">
@@ -6245,9 +6031,7 @@
           <a:ln/>
         </p:spPr>
         <p:txBody>
-          <a:bodyPr wrap="square" rtlCol="0" anchor="ctr">
-            <a:normAutofit/>
-          </a:bodyPr>
+          <a:bodyPr wrap="square" rtlCol="0" anchor="ctr"/>
           <a:lstStyle/>
           <a:p>
             <a:pPr indent="0" marL="0">
@@ -6286,9 +6070,7 @@
           <a:ln/>
         </p:spPr>
         <p:txBody>
-          <a:bodyPr wrap="square" rtlCol="0" anchor="t">
-            <a:normAutofit/>
-          </a:bodyPr>
+          <a:bodyPr wrap="square" rtlCol="0" anchor="t"/>
           <a:lstStyle/>
           <a:p>
             <a:pPr indent="0" marL="0">
@@ -6327,9 +6109,7 @@
           <a:ln/>
         </p:spPr>
         <p:txBody>
-          <a:bodyPr wrap="square" rtlCol="0" anchor="ctr">
-            <a:normAutofit/>
-          </a:bodyPr>
+          <a:bodyPr wrap="square" rtlCol="0" anchor="ctr"/>
           <a:lstStyle/>
           <a:p>
             <a:pPr indent="0" marL="0">
@@ -6368,9 +6148,7 @@
           <a:ln/>
         </p:spPr>
         <p:txBody>
-          <a:bodyPr wrap="square" rtlCol="0" anchor="t">
-            <a:normAutofit/>
-          </a:bodyPr>
+          <a:bodyPr wrap="square" rtlCol="0" anchor="t"/>
           <a:lstStyle/>
           <a:p>
             <a:pPr indent="0" marL="0">
@@ -6409,9 +6187,7 @@
           <a:ln/>
         </p:spPr>
         <p:txBody>
-          <a:bodyPr wrap="square" rtlCol="0" anchor="ctr">
-            <a:normAutofit/>
-          </a:bodyPr>
+          <a:bodyPr wrap="square" rtlCol="0" anchor="ctr"/>
           <a:lstStyle/>
           <a:p>
             <a:pPr indent="0" marL="0">
@@ -6450,9 +6226,7 @@
           <a:ln/>
         </p:spPr>
         <p:txBody>
-          <a:bodyPr wrap="square" rtlCol="0" anchor="t">
-            <a:normAutofit/>
-          </a:bodyPr>
+          <a:bodyPr wrap="square" rtlCol="0" anchor="t"/>
           <a:lstStyle/>
           <a:p>
             <a:pPr indent="0" marL="0">
@@ -6500,9 +6274,7 @@
           </a:ln>
         </p:spPr>
         <p:txBody>
-          <a:bodyPr wrap="square">
-            <a:normAutofit/>
-          </a:bodyPr>
+          <a:bodyPr/>
           <a:p/>
         </p:txBody>
       </p:sp>
@@ -6524,9 +6296,7 @@
           <a:ln/>
         </p:spPr>
         <p:txBody>
-          <a:bodyPr wrap="square" rtlCol="0" anchor="ctr">
-            <a:normAutofit/>
-          </a:bodyPr>
+          <a:bodyPr wrap="square" rtlCol="0" anchor="ctr"/>
           <a:lstStyle/>
           <a:p>
             <a:pPr indent="0" marL="0">
@@ -6565,9 +6335,7 @@
           <a:ln/>
         </p:spPr>
         <p:txBody>
-          <a:bodyPr wrap="square" rtlCol="0" anchor="t">
-            <a:normAutofit/>
-          </a:bodyPr>
+          <a:bodyPr wrap="square" rtlCol="0" anchor="t"/>
           <a:lstStyle/>
           <a:p>
             <a:pPr indent="0" marL="0">
@@ -6606,9 +6374,7 @@
           <a:ln/>
         </p:spPr>
         <p:txBody>
-          <a:bodyPr wrap="square" rtlCol="0" anchor="t">
-            <a:normAutofit/>
-          </a:bodyPr>
+          <a:bodyPr wrap="square" rtlCol="0" anchor="t"/>
           <a:lstStyle/>
           <a:p>
             <a:pPr indent="0" marL="0">
@@ -6647,9 +6413,7 @@
           <a:ln/>
         </p:spPr>
         <p:txBody>
-          <a:bodyPr wrap="square" rtlCol="0" anchor="t">
-            <a:normAutofit/>
-          </a:bodyPr>
+          <a:bodyPr wrap="square" rtlCol="0" anchor="t"/>
           <a:lstStyle/>
           <a:p>
             <a:pPr indent="0" marL="0">
@@ -6688,9 +6452,7 @@
           <a:ln/>
         </p:spPr>
         <p:txBody>
-          <a:bodyPr wrap="square" rtlCol="0" anchor="ctr">
-            <a:normAutofit/>
-          </a:bodyPr>
+          <a:bodyPr wrap="square" rtlCol="0" anchor="ctr"/>
           <a:lstStyle/>
           <a:p>
             <a:pPr algn="r" indent="0" marL="0">
@@ -6761,9 +6523,7 @@
           </a:ln>
         </p:spPr>
         <p:txBody>
-          <a:bodyPr wrap="square">
-            <a:normAutofit/>
-          </a:bodyPr>
+          <a:bodyPr/>
           <a:p/>
         </p:txBody>
       </p:sp>
@@ -6792,9 +6552,7 @@
           </a:ln>
         </p:spPr>
         <p:txBody>
-          <a:bodyPr wrap="square">
-            <a:normAutofit/>
-          </a:bodyPr>
+          <a:bodyPr/>
           <a:p/>
         </p:txBody>
       </p:sp>
@@ -6825,9 +6583,7 @@
           </a:ln>
         </p:spPr>
         <p:txBody>
-          <a:bodyPr wrap="square">
-            <a:normAutofit/>
-          </a:bodyPr>
+          <a:bodyPr/>
           <a:p/>
         </p:txBody>
       </p:sp>
@@ -6849,9 +6605,7 @@
           <a:ln/>
         </p:spPr>
         <p:txBody>
-          <a:bodyPr wrap="square" rtlCol="0" anchor="ctr">
-            <a:normAutofit/>
-          </a:bodyPr>
+          <a:bodyPr wrap="square" rtlCol="0" anchor="ctr"/>
           <a:lstStyle/>
           <a:p>
             <a:pPr algn="ctr" indent="0" marL="0">
@@ -6890,9 +6644,7 @@
           <a:ln/>
         </p:spPr>
         <p:txBody>
-          <a:bodyPr wrap="square" rtlCol="0" anchor="ctr">
-            <a:normAutofit/>
-          </a:bodyPr>
+          <a:bodyPr wrap="square" rtlCol="0" anchor="ctr"/>
           <a:lstStyle/>
           <a:p>
             <a:pPr indent="0" marL="0">
@@ -6931,9 +6683,7 @@
           <a:ln/>
         </p:spPr>
         <p:txBody>
-          <a:bodyPr wrap="square" rtlCol="0" anchor="ctr">
-            <a:normAutofit/>
-          </a:bodyPr>
+          <a:bodyPr wrap="square" rtlCol="0" anchor="ctr"/>
           <a:lstStyle/>
           <a:p>
             <a:pPr indent="0" marL="0">
@@ -6981,9 +6731,7 @@
           </a:ln>
         </p:spPr>
         <p:txBody>
-          <a:bodyPr wrap="square">
-            <a:normAutofit/>
-          </a:bodyPr>
+          <a:bodyPr/>
           <a:p/>
         </p:txBody>
       </p:sp>
@@ -7005,9 +6753,7 @@
           <a:ln/>
         </p:spPr>
         <p:txBody>
-          <a:bodyPr wrap="square" rtlCol="0" anchor="ctr">
-            <a:normAutofit/>
-          </a:bodyPr>
+          <a:bodyPr wrap="square" rtlCol="0" anchor="ctr"/>
           <a:lstStyle/>
           <a:p>
             <a:pPr indent="0" marL="0">
@@ -7046,9 +6792,7 @@
           <a:ln/>
         </p:spPr>
         <p:txBody>
-          <a:bodyPr wrap="square" rtlCol="0" anchor="ctr">
-            <a:normAutofit/>
-          </a:bodyPr>
+          <a:bodyPr wrap="square" rtlCol="0" anchor="ctr"/>
           <a:lstStyle/>
           <a:p>
             <a:pPr indent="0" marL="0">
@@ -7087,9 +6831,7 @@
           <a:ln/>
         </p:spPr>
         <p:txBody>
-          <a:bodyPr wrap="square" rtlCol="0" anchor="t">
-            <a:normAutofit/>
-          </a:bodyPr>
+          <a:bodyPr wrap="square" rtlCol="0" anchor="t"/>
           <a:lstStyle/>
           <a:p>
             <a:pPr indent="0" marL="0">
@@ -7128,9 +6870,7 @@
           <a:ln/>
         </p:spPr>
         <p:txBody>
-          <a:bodyPr wrap="square" rtlCol="0" anchor="ctr">
-            <a:normAutofit/>
-          </a:bodyPr>
+          <a:bodyPr wrap="square" rtlCol="0" anchor="ctr"/>
           <a:lstStyle/>
           <a:p>
             <a:pPr indent="0" marL="0">
@@ -7169,9 +6909,7 @@
           <a:ln/>
         </p:spPr>
         <p:txBody>
-          <a:bodyPr wrap="square" rtlCol="0" anchor="t">
-            <a:normAutofit/>
-          </a:bodyPr>
+          <a:bodyPr wrap="square" rtlCol="0" anchor="t"/>
           <a:lstStyle/>
           <a:p>
             <a:pPr indent="0" marL="0">
@@ -7210,9 +6948,7 @@
           <a:ln/>
         </p:spPr>
         <p:txBody>
-          <a:bodyPr wrap="square" rtlCol="0" anchor="ctr">
-            <a:normAutofit/>
-          </a:bodyPr>
+          <a:bodyPr wrap="square" rtlCol="0" anchor="ctr"/>
           <a:lstStyle/>
           <a:p>
             <a:pPr indent="0" marL="0">
@@ -7251,9 +6987,7 @@
           <a:ln/>
         </p:spPr>
         <p:txBody>
-          <a:bodyPr wrap="square" rtlCol="0" anchor="t">
-            <a:normAutofit/>
-          </a:bodyPr>
+          <a:bodyPr wrap="square" rtlCol="0" anchor="t"/>
           <a:lstStyle/>
           <a:p>
             <a:pPr indent="0" marL="0">
@@ -7301,9 +7035,7 @@
           </a:ln>
         </p:spPr>
         <p:txBody>
-          <a:bodyPr wrap="square">
-            <a:normAutofit/>
-          </a:bodyPr>
+          <a:bodyPr/>
           <a:p/>
         </p:txBody>
       </p:sp>
@@ -7325,9 +7057,7 @@
           <a:ln/>
         </p:spPr>
         <p:txBody>
-          <a:bodyPr wrap="square" rtlCol="0" anchor="ctr">
-            <a:normAutofit/>
-          </a:bodyPr>
+          <a:bodyPr wrap="square" rtlCol="0" anchor="ctr"/>
           <a:lstStyle/>
           <a:p>
             <a:pPr indent="0" marL="0">
@@ -7366,9 +7096,7 @@
           <a:ln/>
         </p:spPr>
         <p:txBody>
-          <a:bodyPr wrap="square" rtlCol="0" anchor="t">
-            <a:normAutofit/>
-          </a:bodyPr>
+          <a:bodyPr wrap="square" rtlCol="0" anchor="t"/>
           <a:lstStyle/>
           <a:p>
             <a:pPr indent="0" marL="0">
@@ -7407,9 +7135,7 @@
           <a:ln/>
         </p:spPr>
         <p:txBody>
-          <a:bodyPr wrap="square" rtlCol="0" anchor="t">
-            <a:normAutofit/>
-          </a:bodyPr>
+          <a:bodyPr wrap="square" rtlCol="0" anchor="t"/>
           <a:lstStyle/>
           <a:p>
             <a:pPr indent="0" marL="0">
@@ -7448,9 +7174,7 @@
           <a:ln/>
         </p:spPr>
         <p:txBody>
-          <a:bodyPr wrap="square" rtlCol="0" anchor="t">
-            <a:normAutofit/>
-          </a:bodyPr>
+          <a:bodyPr wrap="square" rtlCol="0" anchor="t"/>
           <a:lstStyle/>
           <a:p>
             <a:pPr indent="0" marL="0">
@@ -7489,9 +7213,7 @@
           <a:ln/>
         </p:spPr>
         <p:txBody>
-          <a:bodyPr wrap="square" rtlCol="0" anchor="ctr">
-            <a:normAutofit/>
-          </a:bodyPr>
+          <a:bodyPr wrap="square" rtlCol="0" anchor="ctr"/>
           <a:lstStyle/>
           <a:p>
             <a:pPr algn="r" indent="0" marL="0">
